--- a/slides/lab.pptx
+++ b/slides/lab.pptx
@@ -10,25 +10,22 @@
     <p:sldId id="270" r:id="rId4"/>
     <p:sldId id="257" r:id="rId5"/>
     <p:sldId id="258" r:id="rId6"/>
-    <p:sldId id="262" r:id="rId7"/>
+    <p:sldId id="282" r:id="rId7"/>
     <p:sldId id="263" r:id="rId8"/>
     <p:sldId id="264" r:id="rId9"/>
     <p:sldId id="265" r:id="rId10"/>
-    <p:sldId id="266" r:id="rId11"/>
-    <p:sldId id="267" r:id="rId12"/>
-    <p:sldId id="268" r:id="rId13"/>
-    <p:sldId id="269" r:id="rId14"/>
-    <p:sldId id="271" r:id="rId15"/>
-    <p:sldId id="272" r:id="rId16"/>
-    <p:sldId id="273" r:id="rId17"/>
-    <p:sldId id="274" r:id="rId18"/>
-    <p:sldId id="275" r:id="rId19"/>
-    <p:sldId id="276" r:id="rId20"/>
-    <p:sldId id="277" r:id="rId21"/>
-    <p:sldId id="278" r:id="rId22"/>
-    <p:sldId id="279" r:id="rId23"/>
-    <p:sldId id="280" r:id="rId24"/>
-    <p:sldId id="281" r:id="rId25"/>
+    <p:sldId id="269" r:id="rId11"/>
+    <p:sldId id="271" r:id="rId12"/>
+    <p:sldId id="272" r:id="rId13"/>
+    <p:sldId id="273" r:id="rId14"/>
+    <p:sldId id="274" r:id="rId15"/>
+    <p:sldId id="275" r:id="rId16"/>
+    <p:sldId id="276" r:id="rId17"/>
+    <p:sldId id="277" r:id="rId18"/>
+    <p:sldId id="278" r:id="rId19"/>
+    <p:sldId id="279" r:id="rId20"/>
+    <p:sldId id="280" r:id="rId21"/>
+    <p:sldId id="281" r:id="rId22"/>
   </p:sldIdLst>
   <p:sldSz cx="12192000" cy="6858000"/>
   <p:notesSz cx="6858000" cy="9144000"/>
@@ -282,7 +279,7 @@
           <a:p>
             <a:fld id="{519BAEA6-88FC-4542-B3BF-F11A57CC5938}" type="datetimeFigureOut">
               <a:rPr lang="ru-RU" smtClean="0"/>
-              <a:t>14.07.2026</a:t>
+              <a:t>15.07.2026</a:t>
             </a:fld>
             <a:endParaRPr lang="ru-RU"/>
           </a:p>
@@ -480,7 +477,7 @@
           <a:p>
             <a:fld id="{519BAEA6-88FC-4542-B3BF-F11A57CC5938}" type="datetimeFigureOut">
               <a:rPr lang="ru-RU" smtClean="0"/>
-              <a:t>14.07.2026</a:t>
+              <a:t>15.07.2026</a:t>
             </a:fld>
             <a:endParaRPr lang="ru-RU"/>
           </a:p>
@@ -688,7 +685,7 @@
           <a:p>
             <a:fld id="{519BAEA6-88FC-4542-B3BF-F11A57CC5938}" type="datetimeFigureOut">
               <a:rPr lang="ru-RU" smtClean="0"/>
-              <a:t>14.07.2026</a:t>
+              <a:t>15.07.2026</a:t>
             </a:fld>
             <a:endParaRPr lang="ru-RU"/>
           </a:p>
@@ -886,7 +883,7 @@
           <a:p>
             <a:fld id="{519BAEA6-88FC-4542-B3BF-F11A57CC5938}" type="datetimeFigureOut">
               <a:rPr lang="ru-RU" smtClean="0"/>
-              <a:t>14.07.2026</a:t>
+              <a:t>15.07.2026</a:t>
             </a:fld>
             <a:endParaRPr lang="ru-RU"/>
           </a:p>
@@ -1161,7 +1158,7 @@
           <a:p>
             <a:fld id="{519BAEA6-88FC-4542-B3BF-F11A57CC5938}" type="datetimeFigureOut">
               <a:rPr lang="ru-RU" smtClean="0"/>
-              <a:t>14.07.2026</a:t>
+              <a:t>15.07.2026</a:t>
             </a:fld>
             <a:endParaRPr lang="ru-RU"/>
           </a:p>
@@ -1426,7 +1423,7 @@
           <a:p>
             <a:fld id="{519BAEA6-88FC-4542-B3BF-F11A57CC5938}" type="datetimeFigureOut">
               <a:rPr lang="ru-RU" smtClean="0"/>
-              <a:t>14.07.2026</a:t>
+              <a:t>15.07.2026</a:t>
             </a:fld>
             <a:endParaRPr lang="ru-RU"/>
           </a:p>
@@ -1838,7 +1835,7 @@
           <a:p>
             <a:fld id="{519BAEA6-88FC-4542-B3BF-F11A57CC5938}" type="datetimeFigureOut">
               <a:rPr lang="ru-RU" smtClean="0"/>
-              <a:t>14.07.2026</a:t>
+              <a:t>15.07.2026</a:t>
             </a:fld>
             <a:endParaRPr lang="ru-RU"/>
           </a:p>
@@ -1979,7 +1976,7 @@
           <a:p>
             <a:fld id="{519BAEA6-88FC-4542-B3BF-F11A57CC5938}" type="datetimeFigureOut">
               <a:rPr lang="ru-RU" smtClean="0"/>
-              <a:t>14.07.2026</a:t>
+              <a:t>15.07.2026</a:t>
             </a:fld>
             <a:endParaRPr lang="ru-RU"/>
           </a:p>
@@ -2092,7 +2089,7 @@
           <a:p>
             <a:fld id="{519BAEA6-88FC-4542-B3BF-F11A57CC5938}" type="datetimeFigureOut">
               <a:rPr lang="ru-RU" smtClean="0"/>
-              <a:t>14.07.2026</a:t>
+              <a:t>15.07.2026</a:t>
             </a:fld>
             <a:endParaRPr lang="ru-RU"/>
           </a:p>
@@ -2403,7 +2400,7 @@
           <a:p>
             <a:fld id="{519BAEA6-88FC-4542-B3BF-F11A57CC5938}" type="datetimeFigureOut">
               <a:rPr lang="ru-RU" smtClean="0"/>
-              <a:t>14.07.2026</a:t>
+              <a:t>15.07.2026</a:t>
             </a:fld>
             <a:endParaRPr lang="ru-RU"/>
           </a:p>
@@ -2691,7 +2688,7 @@
           <a:p>
             <a:fld id="{519BAEA6-88FC-4542-B3BF-F11A57CC5938}" type="datetimeFigureOut">
               <a:rPr lang="ru-RU" smtClean="0"/>
-              <a:t>14.07.2026</a:t>
+              <a:t>15.07.2026</a:t>
             </a:fld>
             <a:endParaRPr lang="ru-RU"/>
           </a:p>
@@ -2941,7 +2938,7 @@
           <a:p>
             <a:fld id="{519BAEA6-88FC-4542-B3BF-F11A57CC5938}" type="datetimeFigureOut">
               <a:rPr lang="ru-RU" smtClean="0"/>
-              <a:t>14.07.2026</a:t>
+              <a:t>15.07.2026</a:t>
             </a:fld>
             <a:endParaRPr lang="ru-RU"/>
           </a:p>
@@ -3445,476 +3442,6 @@
   <p:cSld>
     <p:spTree>
       <p:nvGrpSpPr>
-        <p:cNvPr id="1" name="">
-          <a:extLst>
-            <a:ext uri="{FF2B5EF4-FFF2-40B4-BE49-F238E27FC236}">
-              <a16:creationId xmlns:a16="http://schemas.microsoft.com/office/drawing/2014/main" id="{DCF8DA70-7D12-08F0-286A-AC86B37FE853}"/>
-            </a:ext>
-          </a:extLst>
-        </p:cNvPr>
-        <p:cNvGrpSpPr/>
-        <p:nvPr/>
-      </p:nvGrpSpPr>
-      <p:grpSpPr>
-        <a:xfrm>
-          <a:off x="0" y="0"/>
-          <a:ext cx="0" cy="0"/>
-          <a:chOff x="0" y="0"/>
-          <a:chExt cx="0" cy="0"/>
-        </a:xfrm>
-      </p:grpSpPr>
-      <p:sp>
-        <p:nvSpPr>
-          <p:cNvPr id="2" name="Заголовок 1">
-            <a:extLst>
-              <a:ext uri="{FF2B5EF4-FFF2-40B4-BE49-F238E27FC236}">
-                <a16:creationId xmlns:a16="http://schemas.microsoft.com/office/drawing/2014/main" id="{202D89D1-7478-516A-AB7F-C3A6BD80B9C5}"/>
-              </a:ext>
-            </a:extLst>
-          </p:cNvPr>
-          <p:cNvSpPr>
-            <a:spLocks noGrp="1"/>
-          </p:cNvSpPr>
-          <p:nvPr>
-            <p:ph type="title"/>
-          </p:nvPr>
-        </p:nvSpPr>
-        <p:spPr/>
-        <p:txBody>
-          <a:bodyPr/>
-          <a:lstStyle/>
-          <a:p>
-            <a:r>
-              <a:rPr lang="ru-RU" dirty="0"/>
-              <a:t>Разбор запущенных </a:t>
-            </a:r>
-            <a:r>
-              <a:rPr lang="en-US" dirty="0"/>
-              <a:t>pods</a:t>
-            </a:r>
-            <a:endParaRPr lang="ru-RU" dirty="0"/>
-          </a:p>
-        </p:txBody>
-      </p:sp>
-      <p:sp>
-        <p:nvSpPr>
-          <p:cNvPr id="3" name="Объект 2">
-            <a:extLst>
-              <a:ext uri="{FF2B5EF4-FFF2-40B4-BE49-F238E27FC236}">
-                <a16:creationId xmlns:a16="http://schemas.microsoft.com/office/drawing/2014/main" id="{17A9321F-A965-04C0-D7E3-E0A0061F9C5B}"/>
-              </a:ext>
-            </a:extLst>
-          </p:cNvPr>
-          <p:cNvSpPr>
-            <a:spLocks noGrp="1"/>
-          </p:cNvSpPr>
-          <p:nvPr>
-            <p:ph idx="1"/>
-          </p:nvPr>
-        </p:nvSpPr>
-        <p:spPr/>
-        <p:txBody>
-          <a:bodyPr>
-            <a:noAutofit/>
-          </a:bodyPr>
-          <a:lstStyle/>
-          <a:p>
-            <a:pPr marL="0" indent="0">
-              <a:buNone/>
-            </a:pPr>
-            <a:r>
-              <a:rPr lang="ru-RU" sz="2000" dirty="0"/>
-              <a:t>Компоненты управления кластером (Control </a:t>
-            </a:r>
-            <a:r>
-              <a:rPr lang="ru-RU" sz="2000" dirty="0" err="1"/>
-              <a:t>Plane</a:t>
-            </a:r>
-            <a:r>
-              <a:rPr lang="ru-RU" sz="2000" dirty="0"/>
-              <a:t>) — такие как </a:t>
-            </a:r>
-            <a:r>
-              <a:rPr lang="ru-RU" sz="2000" dirty="0" err="1"/>
-              <a:t>kube-apiserver</a:t>
-            </a:r>
-            <a:r>
-              <a:rPr lang="ru-RU" sz="2000" dirty="0"/>
-              <a:t>, </a:t>
-            </a:r>
-            <a:r>
-              <a:rPr lang="ru-RU" sz="2000" dirty="0" err="1"/>
-              <a:t>kube-controller-manager</a:t>
-            </a:r>
-            <a:r>
-              <a:rPr lang="ru-RU" sz="2000" dirty="0"/>
-              <a:t> и </a:t>
-            </a:r>
-            <a:r>
-              <a:rPr lang="ru-RU" sz="2000" dirty="0" err="1"/>
-              <a:t>etcd</a:t>
-            </a:r>
-            <a:r>
-              <a:rPr lang="ru-RU" sz="2000" dirty="0"/>
-              <a:t> — запускаются как </a:t>
-            </a:r>
-            <a:r>
-              <a:rPr lang="ru-RU" sz="2000" b="1" dirty="0" err="1"/>
-              <a:t>Static</a:t>
-            </a:r>
-            <a:r>
-              <a:rPr lang="ru-RU" sz="2000" b="1" dirty="0"/>
-              <a:t> </a:t>
-            </a:r>
-            <a:r>
-              <a:rPr lang="ru-RU" sz="2000" b="1" dirty="0" err="1"/>
-              <a:t>Pods</a:t>
-            </a:r>
-            <a:r>
-              <a:rPr lang="ru-RU" sz="2000" dirty="0"/>
-              <a:t> (Статические поды).</a:t>
-            </a:r>
-          </a:p>
-          <a:p>
-            <a:pPr marL="0" indent="0">
-              <a:buNone/>
-            </a:pPr>
-            <a:r>
-              <a:rPr lang="ru-RU" sz="2000" dirty="0"/>
-              <a:t>Они управляются не через API Kubernetes (ведь сам API-сервер еще только должен запуститься!), а напрямую агентом </a:t>
-            </a:r>
-            <a:r>
-              <a:rPr lang="ru-RU" sz="2000" dirty="0" err="1"/>
-              <a:t>kubelet</a:t>
-            </a:r>
-            <a:r>
-              <a:rPr lang="ru-RU" sz="2000" dirty="0"/>
-              <a:t> на конкретной ноде (узле). </a:t>
-            </a:r>
-            <a:r>
-              <a:rPr lang="ru-RU" sz="2000" dirty="0" err="1"/>
-              <a:t>Kubelet</a:t>
-            </a:r>
-            <a:r>
-              <a:rPr lang="ru-RU" sz="2000" dirty="0"/>
-              <a:t> смотрит в специальную локальную папку на сервере (обычно /</a:t>
-            </a:r>
-            <a:r>
-              <a:rPr lang="ru-RU" sz="2000" dirty="0" err="1"/>
-              <a:t>etc</a:t>
-            </a:r>
-            <a:r>
-              <a:rPr lang="ru-RU" sz="2000" dirty="0"/>
-              <a:t>/</a:t>
-            </a:r>
-            <a:r>
-              <a:rPr lang="ru-RU" sz="2000" dirty="0" err="1"/>
-              <a:t>kubernetes</a:t>
-            </a:r>
-            <a:r>
-              <a:rPr lang="ru-RU" sz="2000" dirty="0"/>
-              <a:t>/</a:t>
-            </a:r>
-            <a:r>
-              <a:rPr lang="ru-RU" sz="2000" dirty="0" err="1"/>
-              <a:t>manifests</a:t>
-            </a:r>
-            <a:r>
-              <a:rPr lang="ru-RU" sz="2000" dirty="0"/>
-              <a:t>), видит там YAML-файл API-сервера и запускает его.</a:t>
-            </a:r>
-          </a:p>
-          <a:p>
-            <a:pPr marL="0" indent="0">
-              <a:buNone/>
-            </a:pPr>
-            <a:r>
-              <a:rPr lang="ru-RU" sz="2000" dirty="0"/>
-              <a:t>Правило именования статических подов: [</a:t>
-            </a:r>
-            <a:r>
-              <a:rPr lang="ru-RU" sz="2000" dirty="0" err="1"/>
-              <a:t>Имя_компонента</a:t>
-            </a:r>
-            <a:r>
-              <a:rPr lang="ru-RU" sz="2000" dirty="0"/>
-              <a:t>]-[</a:t>
-            </a:r>
-            <a:r>
-              <a:rPr lang="ru-RU" sz="2000" dirty="0" err="1"/>
-              <a:t>Имя_ноды</a:t>
-            </a:r>
-            <a:r>
-              <a:rPr lang="ru-RU" sz="2000" dirty="0"/>
-              <a:t>].</a:t>
-            </a:r>
-            <a:br>
-              <a:rPr lang="ru-RU" sz="2000" dirty="0"/>
-            </a:br>
-            <a:r>
-              <a:rPr lang="ru-RU" sz="2000" dirty="0"/>
-              <a:t>Поскольку у вас локальный </a:t>
-            </a:r>
-            <a:r>
-              <a:rPr lang="ru-RU" sz="2000" dirty="0" err="1"/>
-              <a:t>однонодовый</a:t>
-            </a:r>
-            <a:r>
-              <a:rPr lang="ru-RU" sz="2000" dirty="0"/>
-              <a:t> кластер </a:t>
-            </a:r>
-            <a:r>
-              <a:rPr lang="ru-RU" sz="2000" dirty="0" err="1"/>
-              <a:t>Minikube</a:t>
-            </a:r>
-            <a:r>
-              <a:rPr lang="ru-RU" sz="2000" dirty="0"/>
-              <a:t>, имя вашей единственной ноды — </a:t>
-            </a:r>
-            <a:r>
-              <a:rPr lang="ru-RU" sz="2000" dirty="0" err="1"/>
-              <a:t>minikube</a:t>
-            </a:r>
-            <a:r>
-              <a:rPr lang="ru-RU" sz="2000" dirty="0"/>
-              <a:t>. Отсюда и фиксированное имя: </a:t>
-            </a:r>
-            <a:r>
-              <a:rPr lang="ru-RU" sz="2000" dirty="0" err="1"/>
-              <a:t>kube-apiserver-minikube</a:t>
-            </a:r>
-            <a:r>
-              <a:rPr lang="ru-RU" sz="2000" dirty="0"/>
-              <a:t>. Никаких случайных хэшей тут нет, так как этот под «прибит гвоздями» к конкретной машине и не может масштабироваться или переезжать на другие ноды.</a:t>
-            </a:r>
-          </a:p>
-        </p:txBody>
-      </p:sp>
-    </p:spTree>
-    <p:extLst>
-      <p:ext uri="{BB962C8B-B14F-4D97-AF65-F5344CB8AC3E}">
-        <p14:creationId xmlns:p14="http://schemas.microsoft.com/office/powerpoint/2010/main" val="626993063"/>
-      </p:ext>
-    </p:extLst>
-  </p:cSld>
-  <p:clrMapOvr>
-    <a:masterClrMapping/>
-  </p:clrMapOvr>
-</p:sld>
-</file>
-
-<file path=ppt/slides/slide11.xml><?xml version="1.0" encoding="utf-8"?>
-<p:sld xmlns:a="http://schemas.openxmlformats.org/drawingml/2006/main" xmlns:r="http://schemas.openxmlformats.org/officeDocument/2006/relationships" xmlns:p="http://schemas.openxmlformats.org/presentationml/2006/main">
-  <p:cSld>
-    <p:spTree>
-      <p:nvGrpSpPr>
-        <p:cNvPr id="1" name="">
-          <a:extLst>
-            <a:ext uri="{FF2B5EF4-FFF2-40B4-BE49-F238E27FC236}">
-              <a16:creationId xmlns:a16="http://schemas.microsoft.com/office/drawing/2014/main" id="{E721E8D9-D5BA-2B06-F54D-67D27EBD695A}"/>
-            </a:ext>
-          </a:extLst>
-        </p:cNvPr>
-        <p:cNvGrpSpPr/>
-        <p:nvPr/>
-      </p:nvGrpSpPr>
-      <p:grpSpPr>
-        <a:xfrm>
-          <a:off x="0" y="0"/>
-          <a:ext cx="0" cy="0"/>
-          <a:chOff x="0" y="0"/>
-          <a:chExt cx="0" cy="0"/>
-        </a:xfrm>
-      </p:grpSpPr>
-      <p:sp>
-        <p:nvSpPr>
-          <p:cNvPr id="2" name="Заголовок 1">
-            <a:extLst>
-              <a:ext uri="{FF2B5EF4-FFF2-40B4-BE49-F238E27FC236}">
-                <a16:creationId xmlns:a16="http://schemas.microsoft.com/office/drawing/2014/main" id="{7BC27293-9686-153E-06AD-687D1F2F4898}"/>
-              </a:ext>
-            </a:extLst>
-          </p:cNvPr>
-          <p:cNvSpPr>
-            <a:spLocks noGrp="1"/>
-          </p:cNvSpPr>
-          <p:nvPr>
-            <p:ph type="title"/>
-          </p:nvPr>
-        </p:nvSpPr>
-        <p:spPr/>
-        <p:txBody>
-          <a:bodyPr/>
-          <a:lstStyle/>
-          <a:p>
-            <a:r>
-              <a:rPr lang="ru-RU" dirty="0"/>
-              <a:t>Разбор запущенных </a:t>
-            </a:r>
-            <a:r>
-              <a:rPr lang="en-US" dirty="0"/>
-              <a:t>pods</a:t>
-            </a:r>
-            <a:endParaRPr lang="ru-RU" dirty="0"/>
-          </a:p>
-        </p:txBody>
-      </p:sp>
-      <p:sp>
-        <p:nvSpPr>
-          <p:cNvPr id="3" name="Объект 2">
-            <a:extLst>
-              <a:ext uri="{FF2B5EF4-FFF2-40B4-BE49-F238E27FC236}">
-                <a16:creationId xmlns:a16="http://schemas.microsoft.com/office/drawing/2014/main" id="{7F27B4A4-7594-A29D-8660-3E6B59AADDCB}"/>
-              </a:ext>
-            </a:extLst>
-          </p:cNvPr>
-          <p:cNvSpPr>
-            <a:spLocks noGrp="1"/>
-          </p:cNvSpPr>
-          <p:nvPr>
-            <p:ph idx="1"/>
-          </p:nvPr>
-        </p:nvSpPr>
-        <p:spPr/>
-        <p:txBody>
-          <a:bodyPr>
-            <a:noAutofit/>
-          </a:bodyPr>
-          <a:lstStyle/>
-          <a:p>
-            <a:pPr marL="0" indent="0">
-              <a:buNone/>
-            </a:pPr>
-            <a:r>
-              <a:rPr lang="ru-RU" sz="2000" dirty="0" err="1"/>
-              <a:t>kube-proxy</a:t>
-            </a:r>
-            <a:r>
-              <a:rPr lang="ru-RU" sz="2000" dirty="0"/>
-              <a:t> запускается с помощью контроллера </a:t>
-            </a:r>
-            <a:r>
-              <a:rPr lang="ru-RU" sz="2000" b="1" dirty="0" err="1"/>
-              <a:t>DaemonSet</a:t>
-            </a:r>
-            <a:r>
-              <a:rPr lang="ru-RU" sz="2000" dirty="0"/>
-              <a:t>.</a:t>
-            </a:r>
-            <a:br>
-              <a:rPr lang="ru-RU" sz="2000" dirty="0"/>
-            </a:br>
-            <a:r>
-              <a:rPr lang="ru-RU" sz="2000" dirty="0"/>
-              <a:t>Задача </a:t>
-            </a:r>
-            <a:r>
-              <a:rPr lang="ru-RU" sz="2000" dirty="0" err="1"/>
-              <a:t>DaemonSet</a:t>
-            </a:r>
-            <a:r>
-              <a:rPr lang="ru-RU" sz="2000" dirty="0"/>
-              <a:t> — гарантировать, что ровно одна копия этого пода будет работать </a:t>
-            </a:r>
-            <a:r>
-              <a:rPr lang="ru-RU" sz="2000" b="1" dirty="0"/>
-              <a:t>на каждой ноде</a:t>
-            </a:r>
-            <a:r>
-              <a:rPr lang="ru-RU" sz="2000" dirty="0"/>
-              <a:t> кластера. Когда вы добавляете новую ноду в большой продакшн-кластер, </a:t>
-            </a:r>
-            <a:r>
-              <a:rPr lang="ru-RU" sz="2000" dirty="0" err="1"/>
-              <a:t>DaemonSet</a:t>
-            </a:r>
-            <a:r>
-              <a:rPr lang="ru-RU" sz="2000" dirty="0"/>
-              <a:t> автоматически разворачивает на ней </a:t>
-            </a:r>
-            <a:r>
-              <a:rPr lang="ru-RU" sz="2000" dirty="0" err="1"/>
-              <a:t>kube-proxy</a:t>
-            </a:r>
-            <a:r>
-              <a:rPr lang="ru-RU" sz="2000" dirty="0"/>
-              <a:t>.</a:t>
-            </a:r>
-          </a:p>
-          <a:p>
-            <a:pPr marL="0" indent="0">
-              <a:buNone/>
-            </a:pPr>
-            <a:r>
-              <a:rPr lang="ru-RU" sz="2000" dirty="0"/>
-              <a:t>Правило именования подов в </a:t>
-            </a:r>
-            <a:r>
-              <a:rPr lang="ru-RU" sz="2000" dirty="0" err="1"/>
-              <a:t>DaemonSet</a:t>
-            </a:r>
-            <a:r>
-              <a:rPr lang="ru-RU" sz="2000" dirty="0"/>
-              <a:t>: [</a:t>
-            </a:r>
-            <a:r>
-              <a:rPr lang="ru-RU" sz="2000" dirty="0" err="1"/>
-              <a:t>Имя_даймонсета</a:t>
-            </a:r>
-            <a:r>
-              <a:rPr lang="ru-RU" sz="2000" dirty="0"/>
-              <a:t>]-[</a:t>
-            </a:r>
-            <a:r>
-              <a:rPr lang="ru-RU" sz="2000" dirty="0" err="1"/>
-              <a:t>Случайный_пятизначный_суффикс</a:t>
-            </a:r>
-            <a:r>
-              <a:rPr lang="ru-RU" sz="2000" dirty="0"/>
-              <a:t>].</a:t>
-            </a:r>
-            <a:br>
-              <a:rPr lang="ru-RU" sz="2000" dirty="0"/>
-            </a:br>
-            <a:r>
-              <a:rPr lang="ru-RU" sz="2000" dirty="0"/>
-              <a:t>Ему не нужен хэш шаблона (как у </a:t>
-            </a:r>
-            <a:r>
-              <a:rPr lang="ru-RU" sz="2000" dirty="0" err="1"/>
-              <a:t>Deployment</a:t>
-            </a:r>
-            <a:r>
-              <a:rPr lang="ru-RU" sz="2000" dirty="0"/>
-              <a:t> в Вопросе 1), потому что он не делает сложных плавных обновлений с параллельным запуском старых и новых версий на одной ноде. Ему нужен просто короткий уникальный суффикс для идентификации пода на конкретном узле. Поэтому имя выглядит примерно как kube-proxy-m4n7q.</a:t>
-            </a:r>
-          </a:p>
-          <a:p>
-            <a:pPr marL="0" indent="0">
-              <a:buNone/>
-            </a:pPr>
-            <a:endParaRPr lang="ru-RU" sz="2000" dirty="0"/>
-          </a:p>
-        </p:txBody>
-      </p:sp>
-    </p:spTree>
-    <p:extLst>
-      <p:ext uri="{BB962C8B-B14F-4D97-AF65-F5344CB8AC3E}">
-        <p14:creationId xmlns:p14="http://schemas.microsoft.com/office/powerpoint/2010/main" val="2566461592"/>
-      </p:ext>
-    </p:extLst>
-  </p:cSld>
-  <p:clrMapOvr>
-    <a:masterClrMapping/>
-  </p:clrMapOvr>
-</p:sld>
-</file>
-
-<file path=ppt/slides/slide12.xml><?xml version="1.0" encoding="utf-8"?>
-<p:sld xmlns:a="http://schemas.openxmlformats.org/drawingml/2006/main" xmlns:r="http://schemas.openxmlformats.org/officeDocument/2006/relationships" xmlns:p="http://schemas.openxmlformats.org/presentationml/2006/main">
-  <p:cSld>
-    <p:spTree>
-      <p:nvGrpSpPr>
         <p:cNvPr id="1" name=""/>
         <p:cNvGrpSpPr/>
         <p:nvPr/>
@@ -3932,7 +3459,7 @@
           <p:cNvPr id="2" name="Заголовок 1">
             <a:extLst>
               <a:ext uri="{FF2B5EF4-FFF2-40B4-BE49-F238E27FC236}">
-                <a16:creationId xmlns:a16="http://schemas.microsoft.com/office/drawing/2014/main" id="{F744DA72-1BFE-B90C-6CAD-77D744243A6B}"/>
+                <a16:creationId xmlns:a16="http://schemas.microsoft.com/office/drawing/2014/main" id="{AC821157-18B2-6818-D9E3-C16289F6DC98}"/>
               </a:ext>
             </a:extLst>
           </p:cNvPr>
@@ -3941,6 +3468,61 @@
           </p:cNvSpPr>
           <p:nvPr>
             <p:ph type="title"/>
+          </p:nvPr>
+        </p:nvSpPr>
+        <p:spPr/>
+        <p:txBody>
+          <a:bodyPr/>
+          <a:lstStyle/>
+          <a:p>
+            <a:r>
+              <a:rPr lang="en-US" b="1" dirty="0">
+                <a:solidFill>
+                  <a:schemeClr val="accent1"/>
+                </a:solidFill>
+              </a:rPr>
+              <a:t>1. </a:t>
+            </a:r>
+            <a:r>
+              <a:rPr lang="ru-RU" b="1" dirty="0">
+                <a:solidFill>
+                  <a:schemeClr val="accent1"/>
+                </a:solidFill>
+              </a:rPr>
+              <a:t>Создаем наше первое приложение </a:t>
+            </a:r>
+            <a:br>
+              <a:rPr lang="en-US" b="1" dirty="0">
+                <a:solidFill>
+                  <a:schemeClr val="accent1"/>
+                </a:solidFill>
+              </a:rPr>
+            </a:br>
+            <a:r>
+              <a:rPr lang="ru-RU" b="1" dirty="0">
+                <a:solidFill>
+                  <a:schemeClr val="accent1"/>
+                </a:solidFill>
+              </a:rPr>
+              <a:t>«Банк котиков»</a:t>
+            </a:r>
+          </a:p>
+        </p:txBody>
+      </p:sp>
+      <p:sp>
+        <p:nvSpPr>
+          <p:cNvPr id="3" name="Объект 2">
+            <a:extLst>
+              <a:ext uri="{FF2B5EF4-FFF2-40B4-BE49-F238E27FC236}">
+                <a16:creationId xmlns:a16="http://schemas.microsoft.com/office/drawing/2014/main" id="{C11E63E0-198F-87C1-E73C-93CAF670F419}"/>
+              </a:ext>
+            </a:extLst>
+          </p:cNvPr>
+          <p:cNvSpPr>
+            <a:spLocks noGrp="1"/>
+          </p:cNvSpPr>
+          <p:nvPr>
+            <p:ph idx="1"/>
           </p:nvPr>
         </p:nvSpPr>
         <p:spPr/>
@@ -3950,63 +3532,12 @@
           </a:bodyPr>
           <a:lstStyle/>
           <a:p>
-            <a:r>
-              <a:rPr lang="ru-RU" dirty="0"/>
-              <a:t>Разбор запущенных </a:t>
-            </a:r>
-            <a:r>
-              <a:rPr lang="en-US" dirty="0"/>
-              <a:t>pods</a:t>
-            </a:r>
-            <a:endParaRPr lang="ru-RU" dirty="0"/>
-          </a:p>
-        </p:txBody>
-      </p:sp>
-      <p:sp>
-        <p:nvSpPr>
-          <p:cNvPr id="3" name="Объект 2">
-            <a:extLst>
-              <a:ext uri="{FF2B5EF4-FFF2-40B4-BE49-F238E27FC236}">
-                <a16:creationId xmlns:a16="http://schemas.microsoft.com/office/drawing/2014/main" id="{BC2AA874-C604-29B2-3054-18137C42E31A}"/>
-              </a:ext>
-            </a:extLst>
-          </p:cNvPr>
-          <p:cNvSpPr>
-            <a:spLocks noGrp="1"/>
-          </p:cNvSpPr>
-          <p:nvPr>
-            <p:ph idx="1"/>
-          </p:nvPr>
-        </p:nvSpPr>
-        <p:spPr/>
-        <p:txBody>
-          <a:bodyPr>
-            <a:normAutofit fontScale="85000" lnSpcReduction="20000"/>
-          </a:bodyPr>
-          <a:lstStyle/>
-          <a:p>
             <a:pPr marL="0" indent="0">
               <a:buNone/>
             </a:pPr>
             <a:r>
               <a:rPr lang="ru-RU" dirty="0"/>
-              <a:t>Для </a:t>
-            </a:r>
-            <a:r>
-              <a:rPr lang="ru-RU" dirty="0" err="1"/>
-              <a:t>Minikube</a:t>
-            </a:r>
-            <a:r>
-              <a:rPr lang="ru-RU" dirty="0"/>
-              <a:t> при самом первом старте — </a:t>
-            </a:r>
-            <a:r>
-              <a:rPr lang="ru-RU" b="1" dirty="0"/>
-              <a:t>да, это абсолютно нормально</a:t>
-            </a:r>
-            <a:r>
-              <a:rPr lang="ru-RU" dirty="0"/>
-              <a:t>.</a:t>
+              <a:t>Создадим файл - cat-bank-stage1.yaml</a:t>
             </a:r>
           </a:p>
           <a:p>
@@ -4014,246 +3545,8 @@
               <a:buNone/>
             </a:pPr>
             <a:r>
-              <a:rPr lang="ru-RU" dirty="0" err="1"/>
-              <a:t>storage-provisioner</a:t>
-            </a:r>
-            <a:r>
-              <a:rPr lang="ru-RU" dirty="0"/>
-              <a:t> — это внутренний плагин </a:t>
-            </a:r>
-            <a:r>
-              <a:rPr lang="ru-RU" dirty="0" err="1"/>
-              <a:t>Minikube</a:t>
-            </a:r>
-            <a:r>
-              <a:rPr lang="ru-RU" dirty="0"/>
-              <a:t>, который отвечает за динамическое выделение места на диске вашего компьютера, когда тесты просят создать </a:t>
-            </a:r>
-            <a:r>
-              <a:rPr lang="ru-RU" dirty="0" err="1"/>
-              <a:t>PersistentVolume</a:t>
-            </a:r>
-            <a:r>
-              <a:rPr lang="ru-RU" dirty="0"/>
-              <a:t> (например, для базы данных).</a:t>
-            </a:r>
-          </a:p>
-          <a:p>
-            <a:pPr marL="0" indent="0">
-              <a:buNone/>
-            </a:pPr>
-            <a:r>
-              <a:rPr lang="ru-RU" b="1" dirty="0"/>
-              <a:t>Почему происходит этот один перезапуск:</a:t>
-            </a:r>
-            <a:br>
-              <a:rPr lang="ru-RU" dirty="0"/>
-            </a:br>
-            <a:r>
-              <a:rPr lang="ru-RU" dirty="0"/>
-              <a:t>При первом запуске команды </a:t>
-            </a:r>
-            <a:r>
-              <a:rPr lang="ru-RU" dirty="0" err="1"/>
-              <a:t>minikube</a:t>
-            </a:r>
-            <a:r>
-              <a:rPr lang="ru-RU" dirty="0"/>
-              <a:t> </a:t>
-            </a:r>
-            <a:r>
-              <a:rPr lang="ru-RU" dirty="0" err="1"/>
-              <a:t>start</a:t>
-            </a:r>
-            <a:r>
-              <a:rPr lang="ru-RU" dirty="0"/>
-              <a:t> происходит инициализация кластера. </a:t>
-            </a:r>
-            <a:r>
-              <a:rPr lang="ru-RU" dirty="0" err="1"/>
-              <a:t>storage-provisioner</a:t>
-            </a:r>
-            <a:r>
-              <a:rPr lang="ru-RU" dirty="0"/>
-              <a:t> запускается очень рано. Ему для полноценной настройки нужно дождаться, пока полностью поднимется и начнет отвечать </a:t>
-            </a:r>
-            <a:r>
-              <a:rPr lang="ru-RU" dirty="0" err="1"/>
-              <a:t>kube-apiserver</a:t>
-            </a:r>
-            <a:r>
-              <a:rPr lang="ru-RU" dirty="0"/>
-              <a:t>.</a:t>
-            </a:r>
-          </a:p>
-          <a:p>
-            <a:pPr marL="0" indent="0">
-              <a:buNone/>
-            </a:pPr>
-            <a:r>
-              <a:rPr lang="ru-RU" dirty="0"/>
-              <a:t>Если API-сервер в этот момент еще загружается, </a:t>
-            </a:r>
-            <a:r>
-              <a:rPr lang="ru-RU" dirty="0" err="1"/>
-              <a:t>storage-provisioner</a:t>
-            </a:r>
-            <a:r>
-              <a:rPr lang="ru-RU" dirty="0"/>
-              <a:t> делает попытку подключиться к нему, получает отказ, завершается с ошибкой и переходит в статус </a:t>
-            </a:r>
-            <a:r>
-              <a:rPr lang="ru-RU" dirty="0" err="1"/>
-              <a:t>Error</a:t>
-            </a:r>
-            <a:r>
-              <a:rPr lang="ru-RU" dirty="0"/>
-              <a:t> или </a:t>
-            </a:r>
-            <a:r>
-              <a:rPr lang="ru-RU" dirty="0" err="1"/>
-              <a:t>CrashLoopBackOff</a:t>
-            </a:r>
-            <a:r>
-              <a:rPr lang="ru-RU" dirty="0"/>
-              <a:t>. Kubernetes видит, что под упал, и согласно своей политике (</a:t>
-            </a:r>
-            <a:r>
-              <a:rPr lang="ru-RU" dirty="0" err="1"/>
-              <a:t>RestartPolicy</a:t>
-            </a:r>
-            <a:r>
-              <a:rPr lang="ru-RU" dirty="0"/>
-              <a:t>: Always) запускает его заново. Ко второй попытке API-сервер уже готов, под успешно подключается, начинает работать, но счетчик RESTARTS навсегда увеличивается на 1.</a:t>
-            </a:r>
-          </a:p>
-          <a:p>
-            <a:pPr marL="0" indent="0">
-              <a:buNone/>
-            </a:pPr>
-            <a:endParaRPr lang="ru-RU" dirty="0"/>
-          </a:p>
-        </p:txBody>
-      </p:sp>
-    </p:spTree>
-    <p:extLst>
-      <p:ext uri="{BB962C8B-B14F-4D97-AF65-F5344CB8AC3E}">
-        <p14:creationId xmlns:p14="http://schemas.microsoft.com/office/powerpoint/2010/main" val="46025888"/>
-      </p:ext>
-    </p:extLst>
-  </p:cSld>
-  <p:clrMapOvr>
-    <a:masterClrMapping/>
-  </p:clrMapOvr>
-</p:sld>
-</file>
-
-<file path=ppt/slides/slide13.xml><?xml version="1.0" encoding="utf-8"?>
-<p:sld xmlns:a="http://schemas.openxmlformats.org/drawingml/2006/main" xmlns:r="http://schemas.openxmlformats.org/officeDocument/2006/relationships" xmlns:p="http://schemas.openxmlformats.org/presentationml/2006/main">
-  <p:cSld>
-    <p:spTree>
-      <p:nvGrpSpPr>
-        <p:cNvPr id="1" name=""/>
-        <p:cNvGrpSpPr/>
-        <p:nvPr/>
-      </p:nvGrpSpPr>
-      <p:grpSpPr>
-        <a:xfrm>
-          <a:off x="0" y="0"/>
-          <a:ext cx="0" cy="0"/>
-          <a:chOff x="0" y="0"/>
-          <a:chExt cx="0" cy="0"/>
-        </a:xfrm>
-      </p:grpSpPr>
-      <p:sp>
-        <p:nvSpPr>
-          <p:cNvPr id="2" name="Заголовок 1">
-            <a:extLst>
-              <a:ext uri="{FF2B5EF4-FFF2-40B4-BE49-F238E27FC236}">
-                <a16:creationId xmlns:a16="http://schemas.microsoft.com/office/drawing/2014/main" id="{AC821157-18B2-6818-D9E3-C16289F6DC98}"/>
-              </a:ext>
-            </a:extLst>
-          </p:cNvPr>
-          <p:cNvSpPr>
-            <a:spLocks noGrp="1"/>
-          </p:cNvSpPr>
-          <p:nvPr>
-            <p:ph type="title"/>
-          </p:nvPr>
-        </p:nvSpPr>
-        <p:spPr/>
-        <p:txBody>
-          <a:bodyPr/>
-          <a:lstStyle/>
-          <a:p>
-            <a:r>
-              <a:rPr lang="en-US" dirty="0"/>
-              <a:t>1. </a:t>
-            </a:r>
-            <a:r>
-              <a:rPr lang="ru-RU" dirty="0"/>
-              <a:t>Создаем наше первое приложение </a:t>
-            </a:r>
-            <a:br>
-              <a:rPr lang="en-US" dirty="0"/>
-            </a:br>
-            <a:r>
-              <a:rPr lang="ru-RU" dirty="0"/>
-              <a:t>«Банк котиков»</a:t>
-            </a:r>
-          </a:p>
-        </p:txBody>
-      </p:sp>
-      <p:sp>
-        <p:nvSpPr>
-          <p:cNvPr id="3" name="Объект 2">
-            <a:extLst>
-              <a:ext uri="{FF2B5EF4-FFF2-40B4-BE49-F238E27FC236}">
-                <a16:creationId xmlns:a16="http://schemas.microsoft.com/office/drawing/2014/main" id="{C11E63E0-198F-87C1-E73C-93CAF670F419}"/>
-              </a:ext>
-            </a:extLst>
-          </p:cNvPr>
-          <p:cNvSpPr>
-            <a:spLocks noGrp="1"/>
-          </p:cNvSpPr>
-          <p:nvPr>
-            <p:ph idx="1"/>
-          </p:nvPr>
-        </p:nvSpPr>
-        <p:spPr/>
-        <p:txBody>
-          <a:bodyPr/>
-          <a:lstStyle/>
-          <a:p>
-            <a:pPr marL="0" indent="0">
-              <a:buNone/>
-            </a:pPr>
-            <a:r>
-              <a:rPr lang="ru-RU" dirty="0"/>
-              <a:t>Файл </a:t>
-            </a:r>
-            <a:r>
-              <a:rPr lang="ru-RU" b="1" dirty="0"/>
-              <a:t>cat-bank-stage1.yaml</a:t>
-            </a:r>
-            <a:endParaRPr lang="ru-RU" dirty="0"/>
-          </a:p>
-          <a:p>
-            <a:pPr marL="0" indent="0">
-              <a:buNone/>
-            </a:pPr>
-            <a:r>
-              <a:rPr lang="ru-RU" dirty="0"/>
-              <a:t>В Kubernetes можно разделять разные сущности через три дефиса (---), и K8s применит их по очереди одной командой.</a:t>
-            </a:r>
-          </a:p>
-          <a:p>
-            <a:pPr marL="0" indent="0">
-              <a:buNone/>
-            </a:pPr>
-            <a:r>
-              <a:rPr lang="ru-RU" b="1" dirty="0"/>
-              <a:t>Что внутри этого файла:</a:t>
+              <a:rPr lang="ru-RU" dirty="0"/>
+              <a:t>Каждый предлагаемый в лабораторной работе файл необходимо внимательно изучить. Что внутри файла:</a:t>
             </a:r>
           </a:p>
           <a:p>
@@ -4263,7 +3556,7 @@
             </a:r>
             <a:r>
               <a:rPr lang="ru-RU" dirty="0"/>
-              <a:t> — здесь лежит HTML-код главной страницы нашего «Банка Котиков».</a:t>
+              <a:t> – здесь лежит HTML-код главной страницы нашего «Банка Котиков».</a:t>
             </a:r>
           </a:p>
           <a:p>
@@ -4273,7 +3566,15 @@
             </a:r>
             <a:r>
               <a:rPr lang="ru-RU" dirty="0"/>
-              <a:t> — шаблон, который создает Под с контейнером </a:t>
+              <a:t> – шаблон, который создает </a:t>
+            </a:r>
+            <a:r>
+              <a:rPr lang="en-US" dirty="0"/>
+              <a:t>pod</a:t>
+            </a:r>
+            <a:r>
+              <a:rPr lang="ru-RU" dirty="0"/>
+              <a:t> с контейнером </a:t>
             </a:r>
             <a:r>
               <a:rPr lang="ru-RU" dirty="0" err="1"/>
@@ -4290,6 +3591,23 @@
             <a:r>
               <a:rPr lang="ru-RU" dirty="0"/>
               <a:t>.</a:t>
+            </a:r>
+          </a:p>
+          <a:p>
+            <a:pPr marL="0" indent="0">
+              <a:buNone/>
+            </a:pPr>
+            <a:r>
+              <a:rPr lang="ru-RU" dirty="0"/>
+              <a:t>*В </a:t>
+            </a:r>
+            <a:r>
+              <a:rPr lang="ru-RU" dirty="0" err="1"/>
+              <a:t>Kubernetes</a:t>
+            </a:r>
+            <a:r>
+              <a:rPr lang="ru-RU" dirty="0"/>
+              <a:t> можно разделять разные сущности через три дефиса (---), и K8s применит их по очереди одной командой.</a:t>
             </a:r>
           </a:p>
           <a:p>
@@ -4345,13 +3663,13 @@
           <p:nvPr>
             <p:extLst>
               <p:ext uri="{D42A27DB-BD31-4B8C-83A1-F6EECF244321}">
-                <p14:modId xmlns:p14="http://schemas.microsoft.com/office/powerpoint/2010/main" val="1911983211"/>
+                <p14:modId xmlns:p14="http://schemas.microsoft.com/office/powerpoint/2010/main" val="1063758687"/>
               </p:ext>
             </p:extLst>
           </p:nvPr>
         </p:nvGraphicFramePr>
         <p:xfrm>
-          <a:off x="10663237" y="1817435"/>
+          <a:off x="10407205" y="1848104"/>
           <a:ext cx="1381125" cy="514350"/>
         </p:xfrm>
         <a:graphic>
@@ -4379,7 +3697,7 @@
                     </p:blipFill>
                     <p:spPr>
                       <a:xfrm>
-                        <a:off x="10663237" y="1817435"/>
+                        <a:off x="10407205" y="1848104"/>
                         <a:ext cx="1381125" cy="514350"/>
                       </a:xfrm>
                       <a:prstGeom prst="rect">
@@ -4412,7 +3730,7 @@
 </p:sld>
 </file>
 
-<file path=ppt/slides/slide14.xml><?xml version="1.0" encoding="utf-8"?>
+<file path=ppt/slides/slide11.xml><?xml version="1.0" encoding="utf-8"?>
 <p:sld xmlns:a="http://schemas.openxmlformats.org/drawingml/2006/main" xmlns:r="http://schemas.openxmlformats.org/officeDocument/2006/relationships" xmlns:p="http://schemas.openxmlformats.org/presentationml/2006/main">
   <p:cSld>
     <p:spTree>
@@ -4457,14 +3775,26 @@
           <a:lstStyle/>
           <a:p>
             <a:r>
-              <a:rPr lang="ru-RU" dirty="0"/>
+              <a:rPr lang="ru-RU" b="1" dirty="0">
+                <a:solidFill>
+                  <a:schemeClr val="accent1"/>
+                </a:solidFill>
+              </a:rPr>
               <a:t>1. Создаем наше первое приложение </a:t>
             </a:r>
             <a:br>
-              <a:rPr lang="en-US" dirty="0"/>
+              <a:rPr lang="en-US" b="1" dirty="0">
+                <a:solidFill>
+                  <a:schemeClr val="accent1"/>
+                </a:solidFill>
+              </a:rPr>
             </a:br>
             <a:r>
-              <a:rPr lang="ru-RU" dirty="0"/>
+              <a:rPr lang="ru-RU" b="1" dirty="0">
+                <a:solidFill>
+                  <a:schemeClr val="accent1"/>
+                </a:solidFill>
+              </a:rPr>
               <a:t>«Банк котиков»</a:t>
             </a:r>
           </a:p>
@@ -4489,7 +3819,7 @@
         <p:spPr/>
         <p:txBody>
           <a:bodyPr>
-            <a:normAutofit lnSpcReduction="10000"/>
+            <a:normAutofit/>
           </a:bodyPr>
           <a:lstStyle/>
           <a:p>
@@ -4646,12 +3976,8 @@
             </a:pPr>
             <a:r>
               <a:rPr lang="ru-RU" dirty="0"/>
-              <a:t>5) Открыть localhost:8080 — банк работает. </a:t>
-            </a:r>
-            <a:br>
-              <a:rPr lang="ru-RU" dirty="0"/>
-            </a:br>
-            <a:endParaRPr lang="ru-RU" dirty="0"/>
+              <a:t>5) Открыть localhost:8080 – банк работает. </a:t>
+            </a:r>
           </a:p>
           <a:p>
             <a:pPr marL="0" indent="0">
@@ -4674,7 +4000,7 @@
 </p:sld>
 </file>
 
-<file path=ppt/slides/slide15.xml><?xml version="1.0" encoding="utf-8"?>
+<file path=ppt/slides/slide12.xml><?xml version="1.0" encoding="utf-8"?>
 <p:sld xmlns:a="http://schemas.openxmlformats.org/drawingml/2006/main" xmlns:r="http://schemas.openxmlformats.org/officeDocument/2006/relationships" xmlns:p="http://schemas.openxmlformats.org/presentationml/2006/main">
   <p:cSld>
     <p:spTree>
@@ -4719,14 +4045,26 @@
           <a:lstStyle/>
           <a:p>
             <a:r>
-              <a:rPr lang="ru-RU" dirty="0"/>
+              <a:rPr lang="ru-RU" b="1" dirty="0">
+                <a:solidFill>
+                  <a:schemeClr val="accent1"/>
+                </a:solidFill>
+              </a:rPr>
               <a:t>1. Создаем наше первое приложение </a:t>
             </a:r>
             <a:br>
-              <a:rPr lang="en-US" dirty="0"/>
+              <a:rPr lang="en-US" b="1" dirty="0">
+                <a:solidFill>
+                  <a:schemeClr val="accent1"/>
+                </a:solidFill>
+              </a:rPr>
             </a:br>
             <a:r>
-              <a:rPr lang="ru-RU" dirty="0"/>
+              <a:rPr lang="ru-RU" b="1" dirty="0">
+                <a:solidFill>
+                  <a:schemeClr val="accent1"/>
+                </a:solidFill>
+              </a:rPr>
               <a:t>«Банк котиков»</a:t>
             </a:r>
           </a:p>
@@ -4777,7 +4115,7 @@
 </p:sld>
 </file>
 
-<file path=ppt/slides/slide16.xml><?xml version="1.0" encoding="utf-8"?>
+<file path=ppt/slides/slide13.xml><?xml version="1.0" encoding="utf-8"?>
 <p:sld xmlns:a="http://schemas.openxmlformats.org/drawingml/2006/main" xmlns:r="http://schemas.openxmlformats.org/officeDocument/2006/relationships" xmlns:p="http://schemas.openxmlformats.org/presentationml/2006/main">
   <p:cSld>
     <p:spTree>
@@ -4822,7 +4160,11 @@
           <a:lstStyle/>
           <a:p>
             <a:r>
-              <a:rPr lang="ru-RU" dirty="0"/>
+              <a:rPr lang="ru-RU" b="1" dirty="0">
+                <a:solidFill>
+                  <a:schemeClr val="accent1"/>
+                </a:solidFill>
+              </a:rPr>
               <a:t>2. Авария «Банка котиков»</a:t>
             </a:r>
           </a:p>
@@ -4847,7 +4189,7 @@
         <p:spPr/>
         <p:txBody>
           <a:bodyPr>
-            <a:normAutofit lnSpcReduction="10000"/>
+            <a:normAutofit/>
           </a:bodyPr>
           <a:lstStyle/>
           <a:p>
@@ -4931,7 +4273,7 @@
             </a:r>
             <a:r>
               <a:rPr lang="ru-RU" dirty="0"/>
-              <a:t> IP-адрес нового пода изменился! Был 10.244.0.15, а стал, например, 10.244.0.18.</a:t>
+              <a:t> у нового пода другие IP-адрес и имя!</a:t>
             </a:r>
           </a:p>
           <a:p>
@@ -4956,7 +4298,7 @@
             </a:r>
             <a:r>
               <a:rPr lang="ru-RU" dirty="0"/>
-              <a:t>, завязанный на IP — он бы упал (теперь и банк недоступен по адресу). </a:t>
+              <a:t>, завязанный на IP – он бы упал (теперь и банк недоступен по адресу). </a:t>
             </a:r>
           </a:p>
         </p:txBody>
@@ -4975,7 +4317,7 @@
         </p:nvSpPr>
         <p:spPr>
           <a:xfrm>
-            <a:off x="662511" y="3835492"/>
+            <a:off x="662511" y="4199029"/>
             <a:ext cx="351378" cy="707886"/>
           </a:xfrm>
           <a:prstGeom prst="rect">
@@ -5014,7 +4356,7 @@
         </p:nvSpPr>
         <p:spPr>
           <a:xfrm>
-            <a:off x="662511" y="2992669"/>
+            <a:off x="662511" y="3356206"/>
             <a:ext cx="351378" cy="707886"/>
           </a:xfrm>
           <a:prstGeom prst="rect">
@@ -5052,7 +4394,7 @@
 </p:sld>
 </file>
 
-<file path=ppt/slides/slide17.xml><?xml version="1.0" encoding="utf-8"?>
+<file path=ppt/slides/slide14.xml><?xml version="1.0" encoding="utf-8"?>
 <p:sld xmlns:a="http://schemas.openxmlformats.org/drawingml/2006/main" xmlns:r="http://schemas.openxmlformats.org/officeDocument/2006/relationships" xmlns:p="http://schemas.openxmlformats.org/presentationml/2006/main">
   <p:cSld>
     <p:spTree>
@@ -5097,18 +4439,34 @@
           <a:lstStyle/>
           <a:p>
             <a:r>
-              <a:rPr lang="en-US" dirty="0"/>
+              <a:rPr lang="en-US" b="1" dirty="0">
+                <a:solidFill>
+                  <a:schemeClr val="accent1"/>
+                </a:solidFill>
+              </a:rPr>
               <a:t>3</a:t>
             </a:r>
             <a:r>
-              <a:rPr lang="ru-RU" dirty="0"/>
+              <a:rPr lang="ru-RU" b="1" dirty="0">
+                <a:solidFill>
+                  <a:schemeClr val="accent1"/>
+                </a:solidFill>
+              </a:rPr>
               <a:t>. Добавляем </a:t>
             </a:r>
             <a:r>
-              <a:rPr lang="en-US" dirty="0"/>
+              <a:rPr lang="en-US" b="1" dirty="0">
+                <a:solidFill>
+                  <a:schemeClr val="accent1"/>
+                </a:solidFill>
+              </a:rPr>
               <a:t>Service</a:t>
             </a:r>
-            <a:endParaRPr lang="ru-RU" dirty="0"/>
+            <a:endParaRPr lang="ru-RU" b="1" dirty="0">
+              <a:solidFill>
+                <a:schemeClr val="accent1"/>
+              </a:solidFill>
+            </a:endParaRPr>
           </a:p>
         </p:txBody>
       </p:sp>
@@ -5128,7 +4486,12 @@
             <p:ph idx="1"/>
           </p:nvPr>
         </p:nvSpPr>
-        <p:spPr/>
+        <p:spPr>
+          <a:xfrm>
+            <a:off x="838200" y="1825625"/>
+            <a:ext cx="10515600" cy="4667250"/>
+          </a:xfrm>
+        </p:spPr>
         <p:txBody>
           <a:bodyPr>
             <a:normAutofit fontScale="92500" lnSpcReduction="20000"/>
@@ -5300,29 +4663,16 @@
               <a:rPr lang="ru-RU" dirty="0"/>
               <a:t> Снова убить под приложения. </a:t>
             </a:r>
+            <a:br>
+              <a:rPr lang="ru-RU" dirty="0"/>
+            </a:br>
             <a:r>
               <a:rPr lang="ru-RU" dirty="0" err="1"/>
               <a:t>Deployment</a:t>
             </a:r>
             <a:r>
               <a:rPr lang="ru-RU" dirty="0"/>
-              <a:t> создает еще один под с еще одним НОВЫМ IP. Но чудо — </a:t>
-            </a:r>
-            <a:r>
-              <a:rPr lang="ru-RU" dirty="0" err="1"/>
-              <a:t>port-forward</a:t>
-            </a:r>
-            <a:r>
-              <a:rPr lang="ru-RU" dirty="0"/>
-              <a:t> до Сервиса </a:t>
-            </a:r>
-            <a:r>
-              <a:rPr lang="ru-RU" b="1" dirty="0"/>
-              <a:t>не порвался</a:t>
-            </a:r>
-            <a:r>
-              <a:rPr lang="ru-RU" dirty="0"/>
-              <a:t>! Сервис сам мгновенно поменял IP внутри вкладки </a:t>
+              <a:t> создает еще один под (новые адрес и имя). Но сервис сам мгновенно поменял IP внутри вкладки </a:t>
             </a:r>
             <a:r>
               <a:rPr lang="ru-RU" dirty="0" err="1"/>
@@ -5330,14 +4680,16 @@
             </a:r>
             <a:r>
               <a:rPr lang="ru-RU" dirty="0"/>
-              <a:t>, и страница продолжает работать без перенастройки со стороны QA.</a:t>
-            </a:r>
-          </a:p>
-          <a:p>
-            <a:pPr marL="0" indent="0">
-              <a:buNone/>
-            </a:pPr>
-            <a:endParaRPr lang="ru-RU" dirty="0"/>
+              <a:t>, и страница продолжает работать без перенастройки со стороны QA (можно перезапустить </a:t>
+            </a:r>
+            <a:r>
+              <a:rPr lang="ru-RU" dirty="0" err="1"/>
+              <a:t>форвардинг</a:t>
+            </a:r>
+            <a:r>
+              <a:rPr lang="ru-RU" dirty="0"/>
+              <a:t> при необходимости).</a:t>
+            </a:r>
           </a:p>
         </p:txBody>
       </p:sp>
@@ -5423,7 +4775,7 @@
 </p:sld>
 </file>
 
-<file path=ppt/slides/slide18.xml><?xml version="1.0" encoding="utf-8"?>
+<file path=ppt/slides/slide15.xml><?xml version="1.0" encoding="utf-8"?>
 <p:sld xmlns:a="http://schemas.openxmlformats.org/drawingml/2006/main" xmlns:r="http://schemas.openxmlformats.org/officeDocument/2006/relationships" xmlns:p="http://schemas.openxmlformats.org/presentationml/2006/main">
   <p:cSld>
     <p:spTree>
@@ -5468,18 +4820,34 @@
           <a:lstStyle/>
           <a:p>
             <a:r>
-              <a:rPr lang="en-US" dirty="0"/>
+              <a:rPr lang="en-US" b="1" dirty="0">
+                <a:solidFill>
+                  <a:schemeClr val="accent1"/>
+                </a:solidFill>
+              </a:rPr>
               <a:t>3</a:t>
             </a:r>
             <a:r>
-              <a:rPr lang="ru-RU" dirty="0"/>
+              <a:rPr lang="ru-RU" b="1" dirty="0">
+                <a:solidFill>
+                  <a:schemeClr val="accent1"/>
+                </a:solidFill>
+              </a:rPr>
               <a:t>. Добавляем </a:t>
             </a:r>
             <a:r>
-              <a:rPr lang="en-US" dirty="0"/>
+              <a:rPr lang="en-US" b="1" dirty="0">
+                <a:solidFill>
+                  <a:schemeClr val="accent1"/>
+                </a:solidFill>
+              </a:rPr>
               <a:t>Service</a:t>
             </a:r>
-            <a:endParaRPr lang="ru-RU" dirty="0"/>
+            <a:endParaRPr lang="ru-RU" b="1" dirty="0">
+              <a:solidFill>
+                <a:schemeClr val="accent1"/>
+              </a:solidFill>
+            </a:endParaRPr>
           </a:p>
         </p:txBody>
       </p:sp>
@@ -5525,23 +4893,87 @@
             </a:pPr>
             <a:r>
               <a:rPr lang="ru-RU" sz="2200" dirty="0"/>
-              <a:t>Снова убить под приложения. </a:t>
-            </a:r>
+              <a:t>Изменить количество котиков на счету и указать статус «Под с сервисом».</a:t>
+            </a:r>
+            <a:br>
+              <a:rPr lang="ru-RU" sz="2200" dirty="0"/>
+            </a:br>
+            <a:r>
+              <a:rPr lang="ru-RU" sz="2200" dirty="0"/>
+              <a:t>Подсказка: найти в </a:t>
+            </a:r>
+            <a:r>
+              <a:rPr lang="en-US" sz="2200" dirty="0" err="1"/>
+              <a:t>ConfigMaps</a:t>
+            </a:r>
+            <a:r>
+              <a:rPr lang="en-US" sz="2200" dirty="0"/>
+              <a:t> </a:t>
+            </a:r>
+            <a:r>
+              <a:rPr lang="ru-RU" sz="2200" dirty="0"/>
+              <a:t>соответствующие настройки, изменить и сохранить число, перезапустить под, восстановить подключение</a:t>
+            </a:r>
+            <a:br>
+              <a:rPr lang="ru-RU" sz="2200" dirty="0"/>
+            </a:br>
+            <a:r>
+              <a:rPr lang="ru-RU" sz="2200" dirty="0"/>
+              <a:t>и проверить результат.</a:t>
+            </a:r>
+            <a:br>
+              <a:rPr lang="ru-RU" sz="2200" dirty="0"/>
+            </a:br>
             <a:r>
               <a:rPr lang="ru-RU" sz="2200" dirty="0" err="1"/>
-              <a:t>Deployment</a:t>
+              <a:t>kubectl</a:t>
             </a:r>
             <a:r>
               <a:rPr lang="ru-RU" sz="2200" dirty="0"/>
-              <a:t> создает еще один под с еще одним НОВЫМ IP. Если </a:t>
+              <a:t> </a:t>
             </a:r>
             <a:r>
               <a:rPr lang="ru-RU" sz="2200" dirty="0" err="1"/>
-              <a:t>форвардинг</a:t>
+              <a:t>rollout</a:t>
             </a:r>
             <a:r>
               <a:rPr lang="ru-RU" sz="2200" dirty="0"/>
-              <a:t> сломался, то повторить команду.</a:t>
+              <a:t> </a:t>
+            </a:r>
+            <a:r>
+              <a:rPr lang="ru-RU" sz="2200" dirty="0" err="1"/>
+              <a:t>restart</a:t>
+            </a:r>
+            <a:r>
+              <a:rPr lang="ru-RU" sz="2200" dirty="0"/>
+              <a:t> </a:t>
+            </a:r>
+            <a:r>
+              <a:rPr lang="ru-RU" sz="2200" dirty="0" err="1"/>
+              <a:t>deployment</a:t>
+            </a:r>
+            <a:r>
+              <a:rPr lang="ru-RU" sz="2200" dirty="0"/>
+              <a:t> </a:t>
+            </a:r>
+            <a:r>
+              <a:rPr lang="en-US" sz="2200" dirty="0"/>
+              <a:t>&lt;</a:t>
+            </a:r>
+            <a:r>
+              <a:rPr lang="ru-RU" sz="2200" dirty="0"/>
+              <a:t>имя</a:t>
+            </a:r>
+            <a:r>
+              <a:rPr lang="en-US" sz="2200" dirty="0"/>
+              <a:t>&gt;</a:t>
+            </a:r>
+            <a:br>
+              <a:rPr lang="ru-RU" sz="2200" dirty="0"/>
+            </a:br>
+            <a:r>
+              <a:rPr lang="ru-RU" sz="2200" i="1" dirty="0"/>
+              <a:t>При реальной работе вы не будете удалять поды руками, вы делаете рестарт деплоя.</a:t>
             </a:r>
           </a:p>
           <a:p>
@@ -5550,105 +4982,16 @@
             </a:pPr>
             <a:r>
               <a:rPr lang="ru-RU" sz="2200" dirty="0"/>
-              <a:t>Изменить количество котиков на счету и указать статус «Под с сервисом».</a:t>
+              <a:t>Изменить целевое количество реплик для нашего </a:t>
+            </a:r>
+            <a:r>
+              <a:rPr lang="en-US" sz="2200" dirty="0"/>
+              <a:t>cat-bank</a:t>
             </a:r>
             <a:br>
               <a:rPr lang="ru-RU" sz="2200" dirty="0"/>
             </a:br>
             <a:r>
-              <a:rPr lang="ru-RU" sz="2200" dirty="0"/>
-              <a:t>Подсказка: найти в </a:t>
-            </a:r>
-            <a:r>
-              <a:rPr lang="en-US" sz="2200" dirty="0" err="1"/>
-              <a:t>ConfigMaps</a:t>
-            </a:r>
-            <a:r>
-              <a:rPr lang="en-US" sz="2200" dirty="0"/>
-              <a:t> </a:t>
-            </a:r>
-            <a:r>
-              <a:rPr lang="ru-RU" sz="2200" dirty="0"/>
-              <a:t>соответствующие настройки, изменить и сохранить число, перезапустить под, восстановить подключение</a:t>
-            </a:r>
-            <a:br>
-              <a:rPr lang="ru-RU" sz="2200" dirty="0"/>
-            </a:br>
-            <a:r>
-              <a:rPr lang="ru-RU" sz="2200" dirty="0"/>
-              <a:t>и проверить результат.</a:t>
-            </a:r>
-            <a:br>
-              <a:rPr lang="ru-RU" sz="2200" dirty="0"/>
-            </a:br>
-            <a:r>
-              <a:rPr lang="ru-RU" sz="2200" dirty="0" err="1"/>
-              <a:t>kubectl</a:t>
-            </a:r>
-            <a:r>
-              <a:rPr lang="ru-RU" sz="2200" dirty="0"/>
-              <a:t> </a:t>
-            </a:r>
-            <a:r>
-              <a:rPr lang="ru-RU" sz="2200" dirty="0" err="1"/>
-              <a:t>rollout</a:t>
-            </a:r>
-            <a:r>
-              <a:rPr lang="ru-RU" sz="2200" dirty="0"/>
-              <a:t> </a:t>
-            </a:r>
-            <a:r>
-              <a:rPr lang="ru-RU" sz="2200" dirty="0" err="1"/>
-              <a:t>restart</a:t>
-            </a:r>
-            <a:r>
-              <a:rPr lang="ru-RU" sz="2200" dirty="0"/>
-              <a:t> </a:t>
-            </a:r>
-            <a:r>
-              <a:rPr lang="ru-RU" sz="2200" dirty="0" err="1"/>
-              <a:t>deployment</a:t>
-            </a:r>
-            <a:r>
-              <a:rPr lang="ru-RU" sz="2200" dirty="0"/>
-              <a:t> </a:t>
-            </a:r>
-            <a:r>
-              <a:rPr lang="en-US" sz="2200" dirty="0"/>
-              <a:t>&lt;</a:t>
-            </a:r>
-            <a:r>
-              <a:rPr lang="ru-RU" sz="2200" dirty="0"/>
-              <a:t>имя</a:t>
-            </a:r>
-            <a:r>
-              <a:rPr lang="en-US" sz="2200" dirty="0"/>
-              <a:t>&gt;</a:t>
-            </a:r>
-            <a:br>
-              <a:rPr lang="ru-RU" sz="2200" dirty="0"/>
-            </a:br>
-            <a:r>
-              <a:rPr lang="ru-RU" sz="2200" i="1" dirty="0"/>
-              <a:t>При реальной работе вы не будете удалять поды руками, вы делаете рестарт деплоя.</a:t>
-            </a:r>
-          </a:p>
-          <a:p>
-            <a:pPr marL="514350" indent="-514350">
-              <a:buAutoNum type="arabicParenR"/>
-            </a:pPr>
-            <a:r>
-              <a:rPr lang="ru-RU" sz="2200" dirty="0"/>
-              <a:t>Изменить целевое количество реплик для нашего </a:t>
-            </a:r>
-            <a:r>
-              <a:rPr lang="en-US" sz="2200" dirty="0"/>
-              <a:t>cat-bank</a:t>
-            </a:r>
-            <a:br>
-              <a:rPr lang="ru-RU" sz="2200" dirty="0"/>
-            </a:br>
-            <a:r>
               <a:rPr lang="ru-RU" sz="2200" dirty="0" err="1"/>
               <a:t>kubectl</a:t>
             </a:r>
@@ -5692,8 +5035,12 @@
               <a:rPr lang="en-US" sz="2200" dirty="0"/>
             </a:br>
             <a:r>
+              <a:rPr lang="en-US" sz="2200" b="1" dirty="0"/>
+              <a:t>GUI Lens</a:t>
+            </a:r>
+            <a:r>
               <a:rPr lang="en-US" sz="2200" dirty="0"/>
-              <a:t>GUI Lens: </a:t>
+              <a:t>: </a:t>
             </a:r>
             <a:r>
               <a:rPr lang="ru-RU" sz="2200" dirty="0"/>
@@ -5801,7 +5148,7 @@
 </p:sld>
 </file>
 
-<file path=ppt/slides/slide19.xml><?xml version="1.0" encoding="utf-8"?>
+<file path=ppt/slides/slide16.xml><?xml version="1.0" encoding="utf-8"?>
 <p:sld xmlns:a="http://schemas.openxmlformats.org/drawingml/2006/main" xmlns:r="http://schemas.openxmlformats.org/officeDocument/2006/relationships" xmlns:p="http://schemas.openxmlformats.org/presentationml/2006/main">
   <p:cSld>
     <p:spTree>
@@ -5846,14 +5193,26 @@
           <a:lstStyle/>
           <a:p>
             <a:r>
-              <a:rPr lang="ru-RU" dirty="0"/>
+              <a:rPr lang="ru-RU" b="1" dirty="0">
+                <a:solidFill>
+                  <a:schemeClr val="accent1"/>
+                </a:solidFill>
+              </a:rPr>
               <a:t>4. Добавляем </a:t>
             </a:r>
             <a:r>
-              <a:rPr lang="en-US" dirty="0"/>
+              <a:rPr lang="en-US" b="1" dirty="0">
+                <a:solidFill>
+                  <a:schemeClr val="accent1"/>
+                </a:solidFill>
+              </a:rPr>
               <a:t>Ingress</a:t>
             </a:r>
-            <a:endParaRPr lang="ru-RU" dirty="0"/>
+            <a:endParaRPr lang="ru-RU" b="1" dirty="0">
+              <a:solidFill>
+                <a:schemeClr val="accent1"/>
+              </a:solidFill>
+            </a:endParaRPr>
           </a:p>
         </p:txBody>
       </p:sp>
@@ -6141,7 +5500,15 @@
             </a:r>
             <a:r>
               <a:rPr lang="ru-RU" sz="2200" dirty="0"/>
-              <a:t> в отдельном терминале ОБЯЗАТЕЛЬНА, иначе </a:t>
+              <a:t> в отдельном терминале </a:t>
+            </a:r>
+            <a:r>
+              <a:rPr lang="ru-RU" sz="2200" b="1" dirty="0"/>
+              <a:t>ОБЯЗАТЕЛЬНА</a:t>
+            </a:r>
+            <a:r>
+              <a:rPr lang="ru-RU" sz="2200" dirty="0"/>
+              <a:t>, иначе </a:t>
             </a:r>
             <a:r>
               <a:rPr lang="ru-RU" sz="2200" dirty="0" err="1"/>
@@ -6258,124 +5625,7 @@
 </p:sld>
 </file>
 
-<file path=ppt/slides/slide2.xml><?xml version="1.0" encoding="utf-8"?>
-<p:sld xmlns:a="http://schemas.openxmlformats.org/drawingml/2006/main" xmlns:r="http://schemas.openxmlformats.org/officeDocument/2006/relationships" xmlns:p="http://schemas.openxmlformats.org/presentationml/2006/main">
-  <p:cSld>
-    <p:spTree>
-      <p:nvGrpSpPr>
-        <p:cNvPr id="1" name=""/>
-        <p:cNvGrpSpPr/>
-        <p:nvPr/>
-      </p:nvGrpSpPr>
-      <p:grpSpPr>
-        <a:xfrm>
-          <a:off x="0" y="0"/>
-          <a:ext cx="0" cy="0"/>
-          <a:chOff x="0" y="0"/>
-          <a:chExt cx="0" cy="0"/>
-        </a:xfrm>
-      </p:grpSpPr>
-      <p:sp>
-        <p:nvSpPr>
-          <p:cNvPr id="2" name="Заголовок 1">
-            <a:extLst>
-              <a:ext uri="{FF2B5EF4-FFF2-40B4-BE49-F238E27FC236}">
-                <a16:creationId xmlns:a16="http://schemas.microsoft.com/office/drawing/2014/main" id="{CED2728A-8816-AE1F-F2F2-A6037E0F49CA}"/>
-              </a:ext>
-            </a:extLst>
-          </p:cNvPr>
-          <p:cNvSpPr>
-            <a:spLocks noGrp="1"/>
-          </p:cNvSpPr>
-          <p:nvPr>
-            <p:ph type="title"/>
-          </p:nvPr>
-        </p:nvSpPr>
-        <p:spPr/>
-        <p:txBody>
-          <a:bodyPr/>
-          <a:lstStyle/>
-          <a:p>
-            <a:r>
-              <a:rPr lang="ru-RU" dirty="0"/>
-              <a:t>Зачем нам разбираться с </a:t>
-            </a:r>
-            <a:r>
-              <a:rPr lang="en-US" dirty="0" err="1"/>
-              <a:t>Minikube</a:t>
-            </a:r>
-            <a:r>
-              <a:rPr lang="en-US" dirty="0"/>
-              <a:t>?</a:t>
-            </a:r>
-            <a:endParaRPr lang="ru-RU" dirty="0"/>
-          </a:p>
-        </p:txBody>
-      </p:sp>
-      <p:sp>
-        <p:nvSpPr>
-          <p:cNvPr id="3" name="Объект 2">
-            <a:extLst>
-              <a:ext uri="{FF2B5EF4-FFF2-40B4-BE49-F238E27FC236}">
-                <a16:creationId xmlns:a16="http://schemas.microsoft.com/office/drawing/2014/main" id="{E27775D7-D33B-C6B3-A0BD-4483F7598718}"/>
-              </a:ext>
-            </a:extLst>
-          </p:cNvPr>
-          <p:cNvSpPr>
-            <a:spLocks noGrp="1"/>
-          </p:cNvSpPr>
-          <p:nvPr>
-            <p:ph idx="1"/>
-          </p:nvPr>
-        </p:nvSpPr>
-        <p:spPr/>
-        <p:txBody>
-          <a:bodyPr/>
-          <a:lstStyle/>
-          <a:p>
-            <a:r>
-              <a:rPr lang="ru-RU" b="1" dirty="0"/>
-              <a:t>Полная свобода действий:</a:t>
-            </a:r>
-            <a:r>
-              <a:rPr lang="ru-RU" dirty="0"/>
-              <a:t> Вы получаете личный полноценный кластер на своем ноутбуке. Здесь можно перезапускать поды, менять конфиги, ломать и чинить окружение — и никто не придет ругаться, что «сломали стенд».</a:t>
-            </a:r>
-          </a:p>
-          <a:p>
-            <a:r>
-              <a:rPr lang="ru-RU" b="1" dirty="0"/>
-              <a:t>Понимание процессов изнутри:</a:t>
-            </a:r>
-            <a:r>
-              <a:rPr lang="ru-RU" dirty="0"/>
-              <a:t> В </a:t>
-            </a:r>
-            <a:r>
-              <a:rPr lang="ru-RU" dirty="0" err="1"/>
-              <a:t>Minikube</a:t>
-            </a:r>
-            <a:r>
-              <a:rPr lang="ru-RU" dirty="0"/>
-              <a:t> мы пройдем весь путь запроса руками, чтобы в реальных проектах мгновенно понимать, где именно застрял трафик.</a:t>
-            </a:r>
-          </a:p>
-        </p:txBody>
-      </p:sp>
-    </p:spTree>
-    <p:extLst>
-      <p:ext uri="{BB962C8B-B14F-4D97-AF65-F5344CB8AC3E}">
-        <p14:creationId xmlns:p14="http://schemas.microsoft.com/office/powerpoint/2010/main" val="49859460"/>
-      </p:ext>
-    </p:extLst>
-  </p:cSld>
-  <p:clrMapOvr>
-    <a:masterClrMapping/>
-  </p:clrMapOvr>
-</p:sld>
-</file>
-
-<file path=ppt/slides/slide20.xml><?xml version="1.0" encoding="utf-8"?>
+<file path=ppt/slides/slide17.xml><?xml version="1.0" encoding="utf-8"?>
 <p:sld xmlns:a="http://schemas.openxmlformats.org/drawingml/2006/main" xmlns:r="http://schemas.openxmlformats.org/officeDocument/2006/relationships" xmlns:p="http://schemas.openxmlformats.org/presentationml/2006/main">
   <p:cSld>
     <p:spTree>
@@ -6420,15 +5670,27 @@
           <a:lstStyle/>
           <a:p>
             <a:r>
-              <a:rPr lang="ru-RU" dirty="0"/>
+              <a:rPr lang="ru-RU" b="1" dirty="0">
+                <a:solidFill>
+                  <a:schemeClr val="accent1"/>
+                </a:solidFill>
+              </a:rPr>
               <a:t>5. Добавляем </a:t>
             </a:r>
             <a:r>
-              <a:rPr lang="ru-RU" dirty="0" err="1"/>
+              <a:rPr lang="ru-RU" b="1" dirty="0" err="1">
+                <a:solidFill>
+                  <a:schemeClr val="accent1"/>
+                </a:solidFill>
+              </a:rPr>
               <a:t>Котобанку</a:t>
             </a:r>
             <a:r>
-              <a:rPr lang="ru-RU" dirty="0"/>
+              <a:rPr lang="ru-RU" b="1" dirty="0">
+                <a:solidFill>
+                  <a:schemeClr val="accent1"/>
+                </a:solidFill>
+              </a:rPr>
               <a:t> работу с внешними сервисами</a:t>
             </a:r>
           </a:p>
@@ -6471,7 +5733,7 @@
             </a:r>
             <a:r>
               <a:rPr lang="ru-RU" sz="2400" dirty="0"/>
-              <a:t>. Теперь на странице появится блок для вывода полезных советов и кнопка для их обновления, которая отправляет HTTP-запросы на внутренний /advice</a:t>
+              <a:t>. </a:t>
             </a:r>
             <a:br>
               <a:rPr lang="ru-RU" sz="2400" dirty="0"/>
@@ -6494,8 +5756,27 @@
             </a:r>
             <a:r>
               <a:rPr lang="ru-RU" sz="2400" dirty="0"/>
-              <a:t>применяем манифест из каталога с файлом)</a:t>
-            </a:r>
+              <a:t>применяем манифест </a:t>
+            </a:r>
+            <a:br>
+              <a:rPr lang="ru-RU" sz="2400" dirty="0"/>
+            </a:br>
+            <a:r>
+              <a:rPr lang="ru-RU" sz="2400" dirty="0"/>
+              <a:t>из каталога с файлом)</a:t>
+            </a:r>
+            <a:br>
+              <a:rPr lang="ru-RU" sz="2400" dirty="0"/>
+            </a:br>
+            <a:r>
+              <a:rPr lang="ru-RU" sz="2400" dirty="0"/>
+              <a:t>Теперь на странице появится блок для вывода полезных советов и кнопка для их обновления, которая отправляет HTTP-запросы на внутренний /</a:t>
+            </a:r>
+            <a:r>
+              <a:rPr lang="ru-RU" sz="2400" dirty="0" err="1"/>
+              <a:t>advice</a:t>
+            </a:r>
+            <a:endParaRPr lang="ru-RU" sz="2400" dirty="0"/>
           </a:p>
           <a:p>
             <a:pPr marL="457200" indent="-457200">
@@ -6562,8 +5843,8 @@
         </p:blipFill>
         <p:spPr>
           <a:xfrm>
-            <a:off x="8372736" y="3429000"/>
-            <a:ext cx="3386142" cy="3128818"/>
+            <a:off x="8677656" y="3710748"/>
+            <a:ext cx="3081222" cy="2847070"/>
           </a:xfrm>
           <a:prstGeom prst="rect">
             <a:avLst/>
@@ -6585,13 +5866,13 @@
           <p:nvPr>
             <p:extLst>
               <p:ext uri="{D42A27DB-BD31-4B8C-83A1-F6EECF244321}">
-                <p14:modId xmlns:p14="http://schemas.microsoft.com/office/powerpoint/2010/main" val="2264601692"/>
+                <p14:modId xmlns:p14="http://schemas.microsoft.com/office/powerpoint/2010/main" val="2043561071"/>
               </p:ext>
             </p:extLst>
           </p:nvPr>
         </p:nvGraphicFramePr>
         <p:xfrm>
-          <a:off x="10810875" y="2533795"/>
+          <a:off x="10377753" y="1996662"/>
           <a:ext cx="1381125" cy="514350"/>
         </p:xfrm>
         <a:graphic>
@@ -6619,7 +5900,7 @@
                     </p:blipFill>
                     <p:spPr>
                       <a:xfrm>
-                        <a:off x="10810875" y="2533795"/>
+                        <a:off x="10377753" y="1996662"/>
                         <a:ext cx="1381125" cy="514350"/>
                       </a:xfrm>
                       <a:prstGeom prst="rect">
@@ -6652,7 +5933,7 @@
 </p:sld>
 </file>
 
-<file path=ppt/slides/slide21.xml><?xml version="1.0" encoding="utf-8"?>
+<file path=ppt/slides/slide18.xml><?xml version="1.0" encoding="utf-8"?>
 <p:sld xmlns:a="http://schemas.openxmlformats.org/drawingml/2006/main" xmlns:r="http://schemas.openxmlformats.org/officeDocument/2006/relationships" xmlns:p="http://schemas.openxmlformats.org/presentationml/2006/main">
   <p:cSld>
     <p:spTree>
@@ -6697,7 +5978,11 @@
           <a:lstStyle/>
           <a:p>
             <a:r>
-              <a:rPr lang="ru-RU" dirty="0"/>
+              <a:rPr lang="ru-RU" b="1" dirty="0">
+                <a:solidFill>
+                  <a:schemeClr val="accent1"/>
+                </a:solidFill>
+              </a:rPr>
               <a:t>6. Заменим сервис на мок</a:t>
             </a:r>
           </a:p>
@@ -6891,7 +6176,7 @@
             </a:pPr>
             <a:r>
               <a:rPr lang="ru-RU" sz="2000" dirty="0"/>
-              <a:t>Меняем в </a:t>
+              <a:t>Изменить в </a:t>
             </a:r>
             <a:r>
               <a:rPr lang="en-US" sz="2000" dirty="0"/>
@@ -7178,7 +6463,7 @@
 </p:sld>
 </file>
 
-<file path=ppt/slides/slide22.xml><?xml version="1.0" encoding="utf-8"?>
+<file path=ppt/slides/slide19.xml><?xml version="1.0" encoding="utf-8"?>
 <p:sld xmlns:a="http://schemas.openxmlformats.org/drawingml/2006/main" xmlns:r="http://schemas.openxmlformats.org/officeDocument/2006/relationships" xmlns:p="http://schemas.openxmlformats.org/presentationml/2006/main">
   <p:cSld>
     <p:spTree>
@@ -7223,7 +6508,11 @@
           <a:lstStyle/>
           <a:p>
             <a:r>
-              <a:rPr lang="ru-RU" dirty="0"/>
+              <a:rPr lang="ru-RU" b="1" dirty="0">
+                <a:solidFill>
+                  <a:schemeClr val="accent1"/>
+                </a:solidFill>
+              </a:rPr>
               <a:t>6. Заменим сервис на мок</a:t>
             </a:r>
           </a:p>
@@ -7325,7 +6614,140 @@
 </p:sld>
 </file>
 
-<file path=ppt/slides/slide23.xml><?xml version="1.0" encoding="utf-8"?>
+<file path=ppt/slides/slide2.xml><?xml version="1.0" encoding="utf-8"?>
+<p:sld xmlns:a="http://schemas.openxmlformats.org/drawingml/2006/main" xmlns:r="http://schemas.openxmlformats.org/officeDocument/2006/relationships" xmlns:p="http://schemas.openxmlformats.org/presentationml/2006/main">
+  <p:cSld>
+    <p:spTree>
+      <p:nvGrpSpPr>
+        <p:cNvPr id="1" name=""/>
+        <p:cNvGrpSpPr/>
+        <p:nvPr/>
+      </p:nvGrpSpPr>
+      <p:grpSpPr>
+        <a:xfrm>
+          <a:off x="0" y="0"/>
+          <a:ext cx="0" cy="0"/>
+          <a:chOff x="0" y="0"/>
+          <a:chExt cx="0" cy="0"/>
+        </a:xfrm>
+      </p:grpSpPr>
+      <p:sp>
+        <p:nvSpPr>
+          <p:cNvPr id="2" name="Заголовок 1">
+            <a:extLst>
+              <a:ext uri="{FF2B5EF4-FFF2-40B4-BE49-F238E27FC236}">
+                <a16:creationId xmlns:a16="http://schemas.microsoft.com/office/drawing/2014/main" id="{CED2728A-8816-AE1F-F2F2-A6037E0F49CA}"/>
+              </a:ext>
+            </a:extLst>
+          </p:cNvPr>
+          <p:cNvSpPr>
+            <a:spLocks noGrp="1"/>
+          </p:cNvSpPr>
+          <p:nvPr>
+            <p:ph type="title"/>
+          </p:nvPr>
+        </p:nvSpPr>
+        <p:spPr/>
+        <p:txBody>
+          <a:bodyPr/>
+          <a:lstStyle/>
+          <a:p>
+            <a:r>
+              <a:rPr lang="ru-RU" b="1" dirty="0">
+                <a:solidFill>
+                  <a:schemeClr val="accent1"/>
+                </a:solidFill>
+              </a:rPr>
+              <a:t>Зачем нам разбираться с </a:t>
+            </a:r>
+            <a:r>
+              <a:rPr lang="en-US" b="1" dirty="0" err="1">
+                <a:solidFill>
+                  <a:schemeClr val="accent1"/>
+                </a:solidFill>
+              </a:rPr>
+              <a:t>Minikube</a:t>
+            </a:r>
+            <a:r>
+              <a:rPr lang="en-US" b="1" dirty="0">
+                <a:solidFill>
+                  <a:schemeClr val="accent1"/>
+                </a:solidFill>
+              </a:rPr>
+              <a:t>?</a:t>
+            </a:r>
+            <a:endParaRPr lang="ru-RU" b="1" dirty="0">
+              <a:solidFill>
+                <a:schemeClr val="accent1"/>
+              </a:solidFill>
+            </a:endParaRPr>
+          </a:p>
+        </p:txBody>
+      </p:sp>
+      <p:sp>
+        <p:nvSpPr>
+          <p:cNvPr id="3" name="Объект 2">
+            <a:extLst>
+              <a:ext uri="{FF2B5EF4-FFF2-40B4-BE49-F238E27FC236}">
+                <a16:creationId xmlns:a16="http://schemas.microsoft.com/office/drawing/2014/main" id="{E27775D7-D33B-C6B3-A0BD-4483F7598718}"/>
+              </a:ext>
+            </a:extLst>
+          </p:cNvPr>
+          <p:cNvSpPr>
+            <a:spLocks noGrp="1"/>
+          </p:cNvSpPr>
+          <p:nvPr>
+            <p:ph idx="1"/>
+          </p:nvPr>
+        </p:nvSpPr>
+        <p:spPr/>
+        <p:txBody>
+          <a:bodyPr/>
+          <a:lstStyle/>
+          <a:p>
+            <a:r>
+              <a:rPr lang="ru-RU" b="1" dirty="0"/>
+              <a:t>Полная свобода действий:</a:t>
+            </a:r>
+            <a:r>
+              <a:rPr lang="ru-RU" dirty="0"/>
+              <a:t> Вы получаете личный полноценный кластер на своем ноутбуке. Здесь можно перезапускать поды, менять конфиги, ломать и чинить окружение — и никто не придет ругаться, что «сломали стенд».</a:t>
+            </a:r>
+          </a:p>
+          <a:p>
+            <a:r>
+              <a:rPr lang="ru-RU" b="1" dirty="0"/>
+              <a:t>Понимание процессов изнутри:</a:t>
+            </a:r>
+            <a:r>
+              <a:rPr lang="ru-RU" dirty="0"/>
+              <a:t> В </a:t>
+            </a:r>
+            <a:r>
+              <a:rPr lang="ru-RU" dirty="0" err="1"/>
+              <a:t>Minikube</a:t>
+            </a:r>
+            <a:r>
+              <a:rPr lang="ru-RU" dirty="0"/>
+              <a:t> мы пройдем весь путь запроса руками, чтобы в реальных проектах мгновенно понимать, где именно застрял трафик.</a:t>
+            </a:r>
+          </a:p>
+        </p:txBody>
+      </p:sp>
+    </p:spTree>
+    <p:extLst>
+      <p:ext uri="{BB962C8B-B14F-4D97-AF65-F5344CB8AC3E}">
+        <p14:creationId xmlns:p14="http://schemas.microsoft.com/office/powerpoint/2010/main" val="49859460"/>
+      </p:ext>
+    </p:extLst>
+  </p:cSld>
+  <p:clrMapOvr>
+    <a:masterClrMapping/>
+  </p:clrMapOvr>
+</p:sld>
+</file>
+
+<file path=ppt/slides/slide20.xml><?xml version="1.0" encoding="utf-8"?>
 <p:sld xmlns:a="http://schemas.openxmlformats.org/drawingml/2006/main" xmlns:r="http://schemas.openxmlformats.org/officeDocument/2006/relationships" xmlns:p="http://schemas.openxmlformats.org/presentationml/2006/main">
   <p:cSld>
     <p:spTree>
@@ -7370,7 +6792,11 @@
           <a:lstStyle/>
           <a:p>
             <a:r>
-              <a:rPr lang="ru-RU" dirty="0"/>
+              <a:rPr lang="ru-RU" b="1" dirty="0">
+                <a:solidFill>
+                  <a:schemeClr val="accent1"/>
+                </a:solidFill>
+              </a:rPr>
               <a:t>6. Заменим сервис на мок</a:t>
             </a:r>
           </a:p>
@@ -7640,7 +7066,7 @@
 </p:sld>
 </file>
 
-<file path=ppt/slides/slide24.xml><?xml version="1.0" encoding="utf-8"?>
+<file path=ppt/slides/slide21.xml><?xml version="1.0" encoding="utf-8"?>
 <p:sld xmlns:a="http://schemas.openxmlformats.org/drawingml/2006/main" xmlns:r="http://schemas.openxmlformats.org/officeDocument/2006/relationships" xmlns:p="http://schemas.openxmlformats.org/presentationml/2006/main">
   <p:cSld>
     <p:spTree>
@@ -7685,14 +7111,26 @@
           <a:lstStyle/>
           <a:p>
             <a:r>
-              <a:rPr lang="ru-RU" dirty="0"/>
+              <a:rPr lang="ru-RU" b="1" dirty="0">
+                <a:solidFill>
+                  <a:schemeClr val="accent1"/>
+                </a:solidFill>
+              </a:rPr>
               <a:t>Самые частые команды </a:t>
             </a:r>
             <a:r>
-              <a:rPr lang="en-US" dirty="0"/>
+              <a:rPr lang="en-US" b="1" dirty="0">
+                <a:solidFill>
+                  <a:schemeClr val="accent1"/>
+                </a:solidFill>
+              </a:rPr>
               <a:t>QA</a:t>
             </a:r>
-            <a:endParaRPr lang="ru-RU" dirty="0"/>
+            <a:endParaRPr lang="ru-RU" b="1" dirty="0">
+              <a:solidFill>
+                <a:schemeClr val="accent1"/>
+              </a:solidFill>
+            </a:endParaRPr>
           </a:p>
         </p:txBody>
       </p:sp>
@@ -7918,8 +7356,24 @@
           <a:lstStyle/>
           <a:p>
             <a:r>
-              <a:rPr lang="ru-RU" dirty="0"/>
-              <a:t>Предварительная установка</a:t>
+              <a:rPr lang="ru-RU" b="1" dirty="0">
+                <a:solidFill>
+                  <a:schemeClr val="accent1"/>
+                </a:solidFill>
+              </a:rPr>
+              <a:t>Предварительная</a:t>
+            </a:r>
+            <a:r>
+              <a:rPr lang="ru-RU" dirty="0"/>
+              <a:t> </a:t>
+            </a:r>
+            <a:r>
+              <a:rPr lang="ru-RU" b="1" dirty="0">
+                <a:solidFill>
+                  <a:schemeClr val="accent1"/>
+                </a:solidFill>
+              </a:rPr>
+              <a:t>установка</a:t>
             </a:r>
           </a:p>
         </p:txBody>
@@ -7944,6 +7398,15 @@
         <p:txBody>
           <a:bodyPr/>
           <a:lstStyle/>
+          <a:p>
+            <a:pPr marL="0" indent="0">
+              <a:buNone/>
+            </a:pPr>
+            <a:r>
+              <a:rPr lang="ru-RU" dirty="0"/>
+              <a:t>Должны быть установлены (стандартными средствами):</a:t>
+            </a:r>
+          </a:p>
           <a:p>
             <a:r>
               <a:rPr lang="en-US" dirty="0"/>
@@ -8087,14 +7550,26 @@
           <a:lstStyle/>
           <a:p>
             <a:r>
-              <a:rPr lang="ru-RU" dirty="0"/>
+              <a:rPr lang="ru-RU" b="1" dirty="0">
+                <a:solidFill>
+                  <a:schemeClr val="accent1"/>
+                </a:solidFill>
+              </a:rPr>
               <a:t>Установка </a:t>
             </a:r>
             <a:r>
-              <a:rPr lang="de-DE" dirty="0" err="1"/>
+              <a:rPr lang="de-DE" b="1" dirty="0" err="1">
+                <a:solidFill>
+                  <a:schemeClr val="accent1"/>
+                </a:solidFill>
+              </a:rPr>
               <a:t>kubectl</a:t>
             </a:r>
-            <a:endParaRPr lang="ru-RU" dirty="0"/>
+            <a:endParaRPr lang="ru-RU" b="1" dirty="0">
+              <a:solidFill>
+                <a:schemeClr val="accent1"/>
+              </a:solidFill>
+            </a:endParaRPr>
           </a:p>
         </p:txBody>
       </p:sp>
@@ -8128,16 +7603,44 @@
               <a:buNone/>
             </a:pPr>
             <a:r>
-              <a:rPr lang="ru-RU" dirty="0"/>
-              <a:t>В </a:t>
+              <a:rPr lang="ru-RU" b="1" dirty="0" err="1"/>
+              <a:t>Kubectl</a:t>
+            </a:r>
+            <a:r>
+              <a:rPr lang="ru-RU" b="1" dirty="0"/>
+              <a:t> – </a:t>
+            </a:r>
+            <a:r>
+              <a:rPr lang="ru-RU" dirty="0"/>
+              <a:t>это главный инструмент командной строки для управления кластерами </a:t>
+            </a:r>
+            <a:r>
+              <a:rPr lang="ru-RU" dirty="0" err="1"/>
+              <a:t>Kubernetes</a:t>
+            </a:r>
+            <a:r>
+              <a:rPr lang="ru-RU" dirty="0"/>
+              <a:t>. Он выступает в роли пульта управления, который отправляет команды на API-сервер кластера. </a:t>
+            </a:r>
+          </a:p>
+          <a:p>
+            <a:pPr marL="0" indent="0">
+              <a:buNone/>
+            </a:pPr>
+            <a:r>
+              <a:rPr lang="ru-RU" dirty="0"/>
+              <a:t>Все команды лабораторной выполняются в </a:t>
             </a:r>
             <a:r>
               <a:rPr lang="en-US" dirty="0"/>
               <a:t>PowerShell </a:t>
             </a:r>
-            <a:r>
-              <a:rPr lang="ru-RU" dirty="0"/>
-              <a:t>(с правами администратора)</a:t>
+            <a:br>
+              <a:rPr lang="ru-RU" dirty="0"/>
+            </a:br>
+            <a:r>
+              <a:rPr lang="ru-RU" dirty="0"/>
+              <a:t>(с правами администратора).</a:t>
             </a:r>
           </a:p>
           <a:p>
@@ -8215,23 +7718,6 @@
               <a:t> (проверка версии)</a:t>
             </a:r>
             <a:endParaRPr lang="de-DE" dirty="0"/>
-          </a:p>
-          <a:p>
-            <a:pPr marL="0" indent="0">
-              <a:buNone/>
-            </a:pPr>
-            <a:r>
-              <a:rPr lang="ru-RU" b="1" dirty="0" err="1"/>
-              <a:t>Kubectl</a:t>
-            </a:r>
-            <a:r>
-              <a:rPr lang="ru-RU" b="1" dirty="0"/>
-              <a:t> -</a:t>
-            </a:r>
-            <a:r>
-              <a:rPr lang="ru-RU" dirty="0"/>
-              <a:t> это главный инструмент командной строки для управления кластерами Kubernetes. Он выступает в роли пульта управления, который отправляет команды на API-сервер кластера. </a:t>
-            </a:r>
           </a:p>
           <a:p>
             <a:pPr marL="0" indent="0">
@@ -8382,8 +7868,8 @@
         </p:blipFill>
         <p:spPr>
           <a:xfrm>
-            <a:off x="3903282" y="4091322"/>
-            <a:ext cx="4385436" cy="2656950"/>
+            <a:off x="7808976" y="4141354"/>
+            <a:ext cx="3881310" cy="2351521"/>
           </a:xfrm>
           <a:prstGeom prst="rect">
             <a:avLst/>
@@ -8442,14 +7928,26 @@
           <a:lstStyle/>
           <a:p>
             <a:r>
-              <a:rPr lang="ru-RU" dirty="0"/>
+              <a:rPr lang="ru-RU" b="1" dirty="0">
+                <a:solidFill>
+                  <a:schemeClr val="accent1"/>
+                </a:solidFill>
+              </a:rPr>
               <a:t>Установка </a:t>
             </a:r>
             <a:r>
-              <a:rPr lang="en-US" dirty="0" err="1"/>
+              <a:rPr lang="en-US" b="1" dirty="0" err="1">
+                <a:solidFill>
+                  <a:schemeClr val="accent1"/>
+                </a:solidFill>
+              </a:rPr>
               <a:t>minikube</a:t>
             </a:r>
-            <a:endParaRPr lang="ru-RU" dirty="0"/>
+            <a:endParaRPr lang="ru-RU" b="1" dirty="0">
+              <a:solidFill>
+                <a:schemeClr val="accent1"/>
+              </a:solidFill>
+            </a:endParaRPr>
           </a:p>
         </p:txBody>
       </p:sp>
@@ -8480,6 +7978,166 @@
               <a:buNone/>
             </a:pPr>
             <a:r>
+              <a:rPr lang="ru-RU" b="1" dirty="0" err="1"/>
+              <a:t>Minikube</a:t>
+            </a:r>
+            <a:r>
+              <a:rPr lang="ru-RU" dirty="0"/>
+              <a:t> </a:t>
+            </a:r>
+            <a:r>
+              <a:rPr lang="en-US" dirty="0"/>
+              <a:t>–</a:t>
+            </a:r>
+            <a:r>
+              <a:rPr lang="ru-RU" dirty="0"/>
+              <a:t> это инструмент, который позволяет запускать локальный кластер </a:t>
+            </a:r>
+            <a:r>
+              <a:rPr lang="ru-RU" dirty="0" err="1"/>
+              <a:t>Kubernetes</a:t>
+            </a:r>
+            <a:r>
+              <a:rPr lang="ru-RU" dirty="0"/>
+              <a:t> из одного узла (</a:t>
+            </a:r>
+            <a:r>
+              <a:rPr lang="ru-RU" dirty="0" err="1"/>
+              <a:t>node</a:t>
+            </a:r>
+            <a:r>
+              <a:rPr lang="ru-RU" dirty="0"/>
+              <a:t>)</a:t>
+            </a:r>
+            <a:r>
+              <a:rPr lang="en-US" dirty="0"/>
+              <a:t>.</a:t>
+            </a:r>
+            <a:r>
+              <a:rPr lang="ru-RU" dirty="0"/>
+              <a:t> </a:t>
+            </a:r>
+          </a:p>
+          <a:p>
+            <a:pPr marL="0" indent="0">
+              <a:buNone/>
+            </a:pPr>
+            <a:r>
+              <a:rPr lang="ru-RU" dirty="0"/>
+              <a:t>Чтобы запустить </a:t>
+            </a:r>
+            <a:r>
+              <a:rPr lang="ru-RU" dirty="0" err="1"/>
+              <a:t>Kubernetes</a:t>
+            </a:r>
+            <a:r>
+              <a:rPr lang="ru-RU" dirty="0"/>
+              <a:t>, </a:t>
+            </a:r>
+            <a:r>
+              <a:rPr lang="ru-RU" dirty="0" err="1"/>
+              <a:t>Minikube</a:t>
+            </a:r>
+            <a:r>
+              <a:rPr lang="ru-RU" dirty="0"/>
+              <a:t> создает изолированную среду. Он может делать это тремя способами (их называют драйверами):</a:t>
+            </a:r>
+          </a:p>
+          <a:p>
+            <a:pPr>
+              <a:buFont typeface="Wingdings" panose="05000000000000000000" pitchFamily="2" charset="2"/>
+              <a:buChar char="ü"/>
+            </a:pPr>
+            <a:r>
+              <a:rPr lang="ru-RU" b="1" dirty="0"/>
+              <a:t>Внутри контейнера</a:t>
+            </a:r>
+            <a:r>
+              <a:rPr lang="ru-RU" dirty="0"/>
+              <a:t> (по умолчанию через </a:t>
+            </a:r>
+            <a:r>
+              <a:rPr lang="ru-RU" dirty="0" err="1"/>
+              <a:t>Docker</a:t>
+            </a:r>
+            <a:r>
+              <a:rPr lang="ru-RU" dirty="0"/>
+              <a:t> или </a:t>
+            </a:r>
+            <a:r>
+              <a:rPr lang="ru-RU" dirty="0" err="1"/>
+              <a:t>Podman</a:t>
+            </a:r>
+            <a:r>
+              <a:rPr lang="ru-RU" dirty="0"/>
+              <a:t>) </a:t>
+            </a:r>
+            <a:r>
+              <a:rPr lang="en-US" dirty="0"/>
+              <a:t>–</a:t>
+            </a:r>
+            <a:r>
+              <a:rPr lang="ru-RU" dirty="0"/>
+              <a:t> самый быстрый и современный способ.</a:t>
+            </a:r>
+          </a:p>
+          <a:p>
+            <a:r>
+              <a:rPr lang="ru-RU" b="1" dirty="0"/>
+              <a:t>Внутри виртуальной машины</a:t>
+            </a:r>
+            <a:r>
+              <a:rPr lang="ru-RU" dirty="0"/>
+              <a:t> (через </a:t>
+            </a:r>
+            <a:r>
+              <a:rPr lang="ru-RU" dirty="0" err="1"/>
+              <a:t>VirtualBox</a:t>
+            </a:r>
+            <a:r>
+              <a:rPr lang="ru-RU" dirty="0"/>
+              <a:t>, VMware, Hyper-V).</a:t>
+            </a:r>
+          </a:p>
+          <a:p>
+            <a:r>
+              <a:rPr lang="ru-RU" b="1" dirty="0"/>
+              <a:t>Напрямую на хосте</a:t>
+            </a:r>
+            <a:r>
+              <a:rPr lang="ru-RU" dirty="0"/>
+              <a:t> (</a:t>
+            </a:r>
+            <a:r>
+              <a:rPr lang="ru-RU" dirty="0" err="1"/>
+              <a:t>bare-metal</a:t>
+            </a:r>
+            <a:r>
+              <a:rPr lang="ru-RU" dirty="0"/>
+              <a:t>, режим </a:t>
+            </a:r>
+            <a:r>
+              <a:rPr lang="ru-RU" dirty="0" err="1"/>
+              <a:t>none</a:t>
+            </a:r>
+            <a:r>
+              <a:rPr lang="ru-RU" dirty="0"/>
+              <a:t>) </a:t>
+            </a:r>
+            <a:r>
+              <a:rPr lang="en-US" dirty="0"/>
+              <a:t>–</a:t>
+            </a:r>
+            <a:r>
+              <a:rPr lang="ru-RU" dirty="0"/>
+              <a:t> используется редко, в основном на Linux.</a:t>
+            </a:r>
+          </a:p>
+          <a:p>
+            <a:pPr marL="0" indent="0">
+              <a:buNone/>
+            </a:pPr>
+            <a:r>
               <a:rPr lang="ru-RU" dirty="0" err="1"/>
               <a:t>winget</a:t>
             </a:r>
@@ -8534,130 +8192,6 @@
               <a:t>(проверка версии)</a:t>
             </a:r>
             <a:endParaRPr lang="en-US" dirty="0"/>
-          </a:p>
-          <a:p>
-            <a:pPr marL="0" indent="0">
-              <a:buNone/>
-            </a:pPr>
-            <a:r>
-              <a:rPr lang="ru-RU" b="1" dirty="0" err="1"/>
-              <a:t>Minikube</a:t>
-            </a:r>
-            <a:r>
-              <a:rPr lang="ru-RU" dirty="0"/>
-              <a:t> </a:t>
-            </a:r>
-            <a:r>
-              <a:rPr lang="en-US" dirty="0"/>
-              <a:t>-</a:t>
-            </a:r>
-            <a:r>
-              <a:rPr lang="ru-RU" dirty="0"/>
-              <a:t> это инструмент, который позволяет запускать локальный кластер Kubernetes из одного узла (</a:t>
-            </a:r>
-            <a:r>
-              <a:rPr lang="ru-RU" dirty="0" err="1"/>
-              <a:t>node</a:t>
-            </a:r>
-            <a:r>
-              <a:rPr lang="ru-RU" dirty="0"/>
-              <a:t>)</a:t>
-            </a:r>
-            <a:r>
-              <a:rPr lang="en-US" dirty="0"/>
-              <a:t>.</a:t>
-            </a:r>
-            <a:r>
-              <a:rPr lang="ru-RU" dirty="0"/>
-              <a:t> </a:t>
-            </a:r>
-          </a:p>
-          <a:p>
-            <a:pPr marL="0" indent="0">
-              <a:buNone/>
-            </a:pPr>
-            <a:r>
-              <a:rPr lang="ru-RU" dirty="0"/>
-              <a:t>Чтобы запустить Kubernetes, </a:t>
-            </a:r>
-            <a:r>
-              <a:rPr lang="ru-RU" dirty="0" err="1"/>
-              <a:t>Minikube</a:t>
-            </a:r>
-            <a:r>
-              <a:rPr lang="ru-RU" dirty="0"/>
-              <a:t> создает изолированную среду. Он может делать это тремя способами (их называют драйверами):</a:t>
-            </a:r>
-          </a:p>
-          <a:p>
-            <a:r>
-              <a:rPr lang="ru-RU" b="1" dirty="0"/>
-              <a:t>Внутри контейнера</a:t>
-            </a:r>
-            <a:r>
-              <a:rPr lang="ru-RU" dirty="0"/>
-              <a:t> (по умолчанию через </a:t>
-            </a:r>
-            <a:r>
-              <a:rPr lang="ru-RU" dirty="0" err="1"/>
-              <a:t>Docker</a:t>
-            </a:r>
-            <a:r>
-              <a:rPr lang="ru-RU" dirty="0"/>
-              <a:t> или </a:t>
-            </a:r>
-            <a:r>
-              <a:rPr lang="ru-RU" dirty="0" err="1"/>
-              <a:t>Podman</a:t>
-            </a:r>
-            <a:r>
-              <a:rPr lang="ru-RU" dirty="0"/>
-              <a:t>) — самый быстрый и современный способ.</a:t>
-            </a:r>
-          </a:p>
-          <a:p>
-            <a:r>
-              <a:rPr lang="ru-RU" b="1" dirty="0"/>
-              <a:t>Внутри виртуальной машины</a:t>
-            </a:r>
-            <a:r>
-              <a:rPr lang="ru-RU" dirty="0"/>
-              <a:t> (через </a:t>
-            </a:r>
-            <a:r>
-              <a:rPr lang="ru-RU" dirty="0" err="1"/>
-              <a:t>VirtualBox</a:t>
-            </a:r>
-            <a:r>
-              <a:rPr lang="ru-RU" dirty="0"/>
-              <a:t>, VMware, Hyper-V).</a:t>
-            </a:r>
-          </a:p>
-          <a:p>
-            <a:r>
-              <a:rPr lang="ru-RU" b="1" dirty="0"/>
-              <a:t>Напрямую на хосте</a:t>
-            </a:r>
-            <a:r>
-              <a:rPr lang="ru-RU" dirty="0"/>
-              <a:t> (</a:t>
-            </a:r>
-            <a:r>
-              <a:rPr lang="ru-RU" dirty="0" err="1"/>
-              <a:t>bare-metal</a:t>
-            </a:r>
-            <a:r>
-              <a:rPr lang="ru-RU" dirty="0"/>
-              <a:t>, режим </a:t>
-            </a:r>
-            <a:r>
-              <a:rPr lang="ru-RU" dirty="0" err="1"/>
-              <a:t>none</a:t>
-            </a:r>
-            <a:r>
-              <a:rPr lang="ru-RU" dirty="0"/>
-              <a:t>) — используется редко, в основном на Linux.</a:t>
-            </a:r>
           </a:p>
           <a:p>
             <a:pPr marL="0" indent="0">
@@ -8685,7 +8219,13 @@
   <p:cSld>
     <p:spTree>
       <p:nvGrpSpPr>
-        <p:cNvPr id="1" name=""/>
+        <p:cNvPr id="1" name="">
+          <a:extLst>
+            <a:ext uri="{FF2B5EF4-FFF2-40B4-BE49-F238E27FC236}">
+              <a16:creationId xmlns:a16="http://schemas.microsoft.com/office/drawing/2014/main" id="{D7580809-F307-9CFF-DF1E-3D443AE8342C}"/>
+            </a:ext>
+          </a:extLst>
+        </p:cNvPr>
         <p:cNvGrpSpPr/>
         <p:nvPr/>
       </p:nvGrpSpPr>
@@ -8702,7 +8242,7 @@
           <p:cNvPr id="2" name="Заголовок 1">
             <a:extLst>
               <a:ext uri="{FF2B5EF4-FFF2-40B4-BE49-F238E27FC236}">
-                <a16:creationId xmlns:a16="http://schemas.microsoft.com/office/drawing/2014/main" id="{FF69FF08-2A5A-F691-4E2A-E77DF49E5A6B}"/>
+                <a16:creationId xmlns:a16="http://schemas.microsoft.com/office/drawing/2014/main" id="{F277A70D-FFE8-066D-48E1-DC31964D4726}"/>
               </a:ext>
             </a:extLst>
           </p:cNvPr>
@@ -8719,67 +8259,55 @@
           <a:lstStyle/>
           <a:p>
             <a:r>
-              <a:rPr lang="ru-RU" dirty="0"/>
-              <a:t>Установка </a:t>
-            </a:r>
-            <a:r>
-              <a:rPr lang="en-US" dirty="0" err="1"/>
-              <a:t>minikube</a:t>
-            </a:r>
-            <a:endParaRPr lang="ru-RU" dirty="0"/>
-          </a:p>
-        </p:txBody>
-      </p:sp>
-      <p:sp>
-        <p:nvSpPr>
-          <p:cNvPr id="3" name="Объект 2">
-            <a:extLst>
-              <a:ext uri="{FF2B5EF4-FFF2-40B4-BE49-F238E27FC236}">
-                <a16:creationId xmlns:a16="http://schemas.microsoft.com/office/drawing/2014/main" id="{9DDA6D6C-EB97-733A-4B2C-04A2516AB18B}"/>
-              </a:ext>
-            </a:extLst>
-          </p:cNvPr>
-          <p:cNvSpPr>
-            <a:spLocks noGrp="1"/>
-          </p:cNvSpPr>
-          <p:nvPr>
-            <p:ph idx="1"/>
-          </p:nvPr>
-        </p:nvSpPr>
-        <p:spPr/>
-        <p:txBody>
-          <a:bodyPr/>
-          <a:lstStyle/>
-          <a:p>
-            <a:endParaRPr lang="ru-RU" dirty="0"/>
+              <a:rPr lang="ru-RU" b="1" dirty="0">
+                <a:solidFill>
+                  <a:schemeClr val="accent1"/>
+                </a:solidFill>
+              </a:rPr>
+              <a:t>Архитектура </a:t>
+            </a:r>
+            <a:r>
+              <a:rPr lang="en-US" b="1" dirty="0" err="1">
+                <a:solidFill>
+                  <a:schemeClr val="accent1"/>
+                </a:solidFill>
+              </a:rPr>
+              <a:t>Minikube</a:t>
+            </a:r>
+            <a:endParaRPr lang="ru-RU" b="1" dirty="0">
+              <a:solidFill>
+                <a:schemeClr val="accent1"/>
+              </a:solidFill>
+            </a:endParaRPr>
           </a:p>
         </p:txBody>
       </p:sp>
       <p:pic>
         <p:nvPicPr>
-          <p:cNvPr id="5" name="Рисунок 4" descr="screen1">
-            <a:extLst>
-              <a:ext uri="{FF2B5EF4-FFF2-40B4-BE49-F238E27FC236}">
-                <a16:creationId xmlns:a16="http://schemas.microsoft.com/office/drawing/2014/main" id="{50746551-2570-C7F4-89B8-A50127D881D3}"/>
+          <p:cNvPr id="5" name="Объект 4">
+            <a:extLst>
+              <a:ext uri="{FF2B5EF4-FFF2-40B4-BE49-F238E27FC236}">
+                <a16:creationId xmlns:a16="http://schemas.microsoft.com/office/drawing/2014/main" id="{FE36AC64-8036-4356-E4C9-6ED817E2E689}"/>
               </a:ext>
             </a:extLst>
           </p:cNvPr>
           <p:cNvPicPr>
-            <a:picLocks noChangeAspect="1"/>
+            <a:picLocks noGrp="1" noChangeAspect="1"/>
           </p:cNvPicPr>
-          <p:nvPr/>
+          <p:nvPr>
+            <p:ph idx="1"/>
+          </p:nvPr>
         </p:nvPicPr>
         <p:blipFill>
           <a:blip r:embed="rId2"/>
-          <a:srcRect t="24755"/>
           <a:stretch>
             <a:fillRect/>
           </a:stretch>
         </p:blipFill>
         <p:spPr>
           <a:xfrm>
-            <a:off x="2336028" y="2241005"/>
-            <a:ext cx="7018283" cy="3520578"/>
+            <a:off x="1424497" y="1825625"/>
+            <a:ext cx="9343006" cy="4351338"/>
           </a:xfrm>
           <a:prstGeom prst="rect">
             <a:avLst/>
@@ -8789,7 +8317,7 @@
     </p:spTree>
     <p:extLst>
       <p:ext uri="{BB962C8B-B14F-4D97-AF65-F5344CB8AC3E}">
-        <p14:creationId xmlns:p14="http://schemas.microsoft.com/office/powerpoint/2010/main" val="1741605622"/>
+        <p14:creationId xmlns:p14="http://schemas.microsoft.com/office/powerpoint/2010/main" val="3154588583"/>
       </p:ext>
     </p:extLst>
   </p:cSld>
@@ -8838,14 +8366,26 @@
           <a:lstStyle/>
           <a:p>
             <a:r>
-              <a:rPr lang="ru-RU" dirty="0"/>
+              <a:rPr lang="ru-RU" b="1" dirty="0">
+                <a:solidFill>
+                  <a:schemeClr val="accent1"/>
+                </a:solidFill>
+              </a:rPr>
               <a:t>Запуск </a:t>
             </a:r>
             <a:r>
-              <a:rPr lang="en-US" dirty="0" err="1"/>
+              <a:rPr lang="en-US" b="1" dirty="0" err="1">
+                <a:solidFill>
+                  <a:schemeClr val="accent1"/>
+                </a:solidFill>
+              </a:rPr>
               <a:t>minikube</a:t>
             </a:r>
-            <a:endParaRPr lang="ru-RU" dirty="0"/>
+            <a:endParaRPr lang="ru-RU" b="1" dirty="0">
+              <a:solidFill>
+                <a:schemeClr val="accent1"/>
+              </a:solidFill>
+            </a:endParaRPr>
           </a:p>
         </p:txBody>
       </p:sp>
@@ -8865,7 +8405,12 @@
             <p:ph idx="1"/>
           </p:nvPr>
         </p:nvSpPr>
-        <p:spPr/>
+        <p:spPr>
+          <a:xfrm>
+            <a:off x="838200" y="1690688"/>
+            <a:ext cx="10515600" cy="4351338"/>
+          </a:xfrm>
+        </p:spPr>
         <p:txBody>
           <a:bodyPr/>
           <a:lstStyle/>
@@ -9030,14 +8575,26 @@
           <a:lstStyle/>
           <a:p>
             <a:r>
-              <a:rPr lang="ru-RU" dirty="0"/>
+              <a:rPr lang="ru-RU" b="1" dirty="0">
+                <a:solidFill>
+                  <a:schemeClr val="accent1"/>
+                </a:solidFill>
+              </a:rPr>
               <a:t>Запуск </a:t>
             </a:r>
             <a:r>
-              <a:rPr lang="en-US" dirty="0" err="1"/>
+              <a:rPr lang="en-US" b="1" dirty="0" err="1">
+                <a:solidFill>
+                  <a:schemeClr val="accent1"/>
+                </a:solidFill>
+              </a:rPr>
               <a:t>minikube</a:t>
             </a:r>
-            <a:endParaRPr lang="ru-RU" dirty="0"/>
+            <a:endParaRPr lang="ru-RU" b="1" dirty="0">
+              <a:solidFill>
+                <a:schemeClr val="accent1"/>
+              </a:solidFill>
+            </a:endParaRPr>
           </a:p>
         </p:txBody>
       </p:sp>
@@ -9125,14 +8682,26 @@
           <a:lstStyle/>
           <a:p>
             <a:r>
-              <a:rPr lang="ru-RU" dirty="0"/>
+              <a:rPr lang="ru-RU" b="1" dirty="0">
+                <a:solidFill>
+                  <a:schemeClr val="accent1"/>
+                </a:solidFill>
+              </a:rPr>
               <a:t>Разбор запущенных </a:t>
             </a:r>
             <a:r>
-              <a:rPr lang="en-US" dirty="0"/>
+              <a:rPr lang="en-US" b="1" dirty="0">
+                <a:solidFill>
+                  <a:schemeClr val="accent1"/>
+                </a:solidFill>
+              </a:rPr>
               <a:t>pods</a:t>
             </a:r>
-            <a:endParaRPr lang="ru-RU" dirty="0"/>
+            <a:endParaRPr lang="ru-RU" b="1" dirty="0">
+              <a:solidFill>
+                <a:schemeClr val="accent1"/>
+              </a:solidFill>
+            </a:endParaRPr>
           </a:p>
         </p:txBody>
       </p:sp>
@@ -9168,29 +8737,91 @@
               <a:buNone/>
             </a:pPr>
             <a:r>
+              <a:rPr lang="ru-RU" sz="2000" dirty="0"/>
+              <a:t>Что уже запустил </a:t>
+            </a:r>
+            <a:r>
+              <a:rPr lang="en-US" sz="2000" dirty="0"/>
+              <a:t>Kubernetes?</a:t>
+            </a:r>
+            <a:endParaRPr lang="ru-RU" sz="2000" dirty="0"/>
+          </a:p>
+          <a:p>
+            <a:pPr marL="0" indent="0">
+              <a:buNone/>
+            </a:pPr>
+            <a:r>
+              <a:rPr lang="ru-RU" sz="2000" dirty="0" err="1"/>
+              <a:t>kubectl</a:t>
+            </a:r>
+            <a:r>
+              <a:rPr lang="ru-RU" sz="2000" dirty="0"/>
+              <a:t> </a:t>
+            </a:r>
+            <a:r>
+              <a:rPr lang="ru-RU" sz="2000" dirty="0" err="1"/>
+              <a:t>get</a:t>
+            </a:r>
+            <a:r>
+              <a:rPr lang="ru-RU" sz="2000" dirty="0"/>
+              <a:t> </a:t>
+            </a:r>
+            <a:r>
+              <a:rPr lang="ru-RU" sz="2000" dirty="0" err="1"/>
+              <a:t>pods</a:t>
+            </a:r>
+            <a:r>
+              <a:rPr lang="ru-RU" sz="2000" dirty="0"/>
+              <a:t> -A (команда для вывода всех подов)</a:t>
+            </a:r>
+          </a:p>
+          <a:p>
+            <a:r>
               <a:rPr lang="ru-RU" sz="2000" dirty="0" err="1"/>
               <a:t>CoreDNS</a:t>
             </a:r>
             <a:r>
               <a:rPr lang="ru-RU" sz="2000" dirty="0"/>
-              <a:t> разворачивается как </a:t>
-            </a:r>
+              <a:t> помогает сервисам находить друг друга</a:t>
+            </a:r>
+          </a:p>
+          <a:p>
             <a:r>
               <a:rPr lang="ru-RU" sz="2000" dirty="0" err="1"/>
-              <a:t>Deployment</a:t>
+              <a:t>kube-proxy</a:t>
             </a:r>
             <a:r>
               <a:rPr lang="ru-RU" sz="2000" dirty="0"/>
-              <a:t>, потому что нам важна высокая доступность: если один под (</a:t>
-            </a:r>
+              <a:t> направляет сетевой трафик</a:t>
+            </a:r>
+          </a:p>
+          <a:p>
             <a:r>
               <a:rPr lang="ru-RU" sz="2000" dirty="0" err="1"/>
-              <a:t>pod</a:t>
+              <a:t>etcd</a:t>
             </a:r>
             <a:r>
               <a:rPr lang="ru-RU" sz="2000" dirty="0"/>
-              <a:t>) упадет, должен подняться другой, а если вырастет нагрузка — количество подов должно автоматически увеличиться.</a:t>
-            </a:r>
+              <a:t> хранит состояние кластера</a:t>
+            </a:r>
+          </a:p>
+          <a:p>
+            <a:r>
+              <a:rPr lang="ru-RU" sz="2000" dirty="0" err="1"/>
+              <a:t>kube-apiserver</a:t>
+            </a:r>
+            <a:r>
+              <a:rPr lang="ru-RU" sz="2000" dirty="0"/>
+              <a:t> принимает команды </a:t>
+            </a:r>
+            <a:r>
+              <a:rPr lang="ru-RU" sz="2000" dirty="0" err="1"/>
+              <a:t>kubectl</a:t>
+            </a:r>
+            <a:endParaRPr lang="ru-RU" sz="2000" dirty="0"/>
+          </a:p>
+          <a:p>
+            <a:endParaRPr lang="ru-RU" sz="2000" dirty="0"/>
           </a:p>
           <a:p>
             <a:pPr marL="0" indent="0">
@@ -9198,140 +8829,15 @@
             </a:pPr>
             <a:r>
               <a:rPr lang="ru-RU" sz="2000" dirty="0"/>
-              <a:t>Имя собирается из трех частей: </a:t>
-            </a:r>
-            <a:r>
-              <a:rPr lang="ru-RU" sz="2000" b="1" dirty="0"/>
-              <a:t>[</a:t>
-            </a:r>
-            <a:r>
-              <a:rPr lang="ru-RU" sz="2000" b="1" dirty="0" err="1"/>
-              <a:t>Имя_деплоймента</a:t>
-            </a:r>
-            <a:r>
-              <a:rPr lang="ru-RU" sz="2000" b="1" dirty="0"/>
-              <a:t>] </a:t>
+              <a:t>В этой лабораторной нас будут интересовать только </a:t>
+            </a:r>
+            <a:r>
+              <a:rPr lang="ru-RU" sz="2000" dirty="0" err="1"/>
+              <a:t>Pod'ы</a:t>
             </a:r>
             <a:r>
               <a:rPr lang="ru-RU" sz="2000" dirty="0"/>
-              <a:t>+ </a:t>
-            </a:r>
-            <a:r>
-              <a:rPr lang="ru-RU" sz="2000" b="1" dirty="0"/>
-              <a:t>[</a:t>
-            </a:r>
-            <a:r>
-              <a:rPr lang="ru-RU" sz="2000" b="1" dirty="0" err="1"/>
-              <a:t>Хэш_шаблона</a:t>
-            </a:r>
-            <a:r>
-              <a:rPr lang="ru-RU" sz="2000" b="1" dirty="0"/>
-              <a:t>] </a:t>
-            </a:r>
-            <a:r>
-              <a:rPr lang="ru-RU" sz="2000" dirty="0"/>
-              <a:t>+ </a:t>
-            </a:r>
-            <a:r>
-              <a:rPr lang="ru-RU" sz="2000" b="1" dirty="0"/>
-              <a:t>[</a:t>
-            </a:r>
-            <a:r>
-              <a:rPr lang="ru-RU" sz="2000" b="1" dirty="0" err="1"/>
-              <a:t>Случайный_суффикс</a:t>
-            </a:r>
-            <a:r>
-              <a:rPr lang="ru-RU" sz="2000" b="1" dirty="0"/>
-              <a:t>].</a:t>
-            </a:r>
-          </a:p>
-          <a:p>
-            <a:r>
-              <a:rPr lang="ru-RU" sz="2000" b="1" dirty="0" err="1"/>
-              <a:t>coredns</a:t>
-            </a:r>
-            <a:r>
-              <a:rPr lang="ru-RU" sz="2000" dirty="0"/>
-              <a:t> — базовое имя самого развертывания.</a:t>
-            </a:r>
-          </a:p>
-          <a:p>
-            <a:r>
-              <a:rPr lang="ru-RU" sz="2000" b="1" dirty="0"/>
-              <a:t>Вторая часть</a:t>
-            </a:r>
-            <a:r>
-              <a:rPr lang="ru-RU" sz="2000" dirty="0"/>
-              <a:t> — это </a:t>
-            </a:r>
-            <a:r>
-              <a:rPr lang="ru-RU" sz="2000" b="1" dirty="0"/>
-              <a:t>хэш (</a:t>
-            </a:r>
-            <a:r>
-              <a:rPr lang="ru-RU" sz="2000" b="1" dirty="0" err="1"/>
-              <a:t>Pod</a:t>
-            </a:r>
-            <a:r>
-              <a:rPr lang="ru-RU" sz="2000" b="1" dirty="0"/>
-              <a:t> </a:t>
-            </a:r>
-            <a:r>
-              <a:rPr lang="ru-RU" sz="2000" b="1" dirty="0" err="1"/>
-              <a:t>Template</a:t>
-            </a:r>
-            <a:r>
-              <a:rPr lang="ru-RU" sz="2000" b="1" dirty="0"/>
-              <a:t> </a:t>
-            </a:r>
-            <a:r>
-              <a:rPr lang="ru-RU" sz="2000" b="1" dirty="0" err="1"/>
-              <a:t>Hash</a:t>
-            </a:r>
-            <a:r>
-              <a:rPr lang="ru-RU" sz="2000" b="1" dirty="0"/>
-              <a:t>)</a:t>
-            </a:r>
-            <a:r>
-              <a:rPr lang="ru-RU" sz="2000" dirty="0"/>
-              <a:t>. Kubernetes берет конфигурацию пода (образ, порты, переменные окружения), которую вы описали, и кодирует ее в этот хэш.</a:t>
-            </a:r>
-          </a:p>
-          <a:p>
-            <a:pPr lvl="1"/>
-            <a:r>
-              <a:rPr lang="ru-RU" sz="2000" i="1" dirty="0"/>
-              <a:t>Почему это важно:</a:t>
-            </a:r>
-            <a:r>
-              <a:rPr lang="ru-RU" sz="2000" dirty="0"/>
-              <a:t> Если вы обновите версию </a:t>
-            </a:r>
-            <a:r>
-              <a:rPr lang="ru-RU" sz="2000" dirty="0" err="1"/>
-              <a:t>CoreDNS</a:t>
-            </a:r>
-            <a:r>
-              <a:rPr lang="ru-RU" sz="2000" dirty="0"/>
-              <a:t>, Kubernetes создаст новый хэш (например, 8a55231...). По этому хэшу K8s понимает, какие поды относятся к старой версии приложения, а какие к новой, позволяя делать плавное обновление (Rolling Update) без остановки сети.</a:t>
-            </a:r>
-          </a:p>
-          <a:p>
-            <a:r>
-              <a:rPr lang="ru-RU" sz="2000" b="1" dirty="0"/>
-              <a:t>Третья часть</a:t>
-            </a:r>
-            <a:r>
-              <a:rPr lang="ru-RU" sz="2000" dirty="0"/>
-              <a:t> — уникальный случайный суффикс конкретного пода. Поскольку подов </a:t>
-            </a:r>
-            <a:r>
-              <a:rPr lang="ru-RU" sz="2000" dirty="0" err="1"/>
-              <a:t>CoreDNS</a:t>
-            </a:r>
-            <a:r>
-              <a:rPr lang="ru-RU" sz="2000" dirty="0"/>
-              <a:t> может быть несколько (например, 2 или 3 для отказоустойчивости), у каждого из них должен быть свой уникальный идентификатор в кластере, чтобы K8s их не перепутал.</a:t>
+              <a:t> нашего приложения. </a:t>
             </a:r>
           </a:p>
         </p:txBody>
